--- a/Extended data figures and tables/Fig. S6/Fig. S6.pptx
+++ b/Extended data figures and tables/Fig. S6/Fig. S6.pptx
@@ -13,7 +13,7 @@
   <p:sldIdLst>
     <p:sldId id="256" r:id="rId3"/>
   </p:sldIdLst>
-  <p:sldSz cx="11879580" cy="5759450"/>
+  <p:sldSz cx="11879580" cy="7559675"/>
   <p:notesSz cx="6858000" cy="9144000"/>
   <p:custDataLst>
     <p:tags r:id="rId9"/>
@@ -373,8 +373,8 @@
         </p:nvSpPr>
         <p:spPr>
           <a:xfrm>
-            <a:off x="246459" y="1143000"/>
-            <a:ext cx="6365081" cy="3086100"/>
+            <a:off x="1004207" y="1143000"/>
+            <a:ext cx="4849585" cy="3086100"/>
           </a:xfrm>
           <a:prstGeom prst="rect">
             <a:avLst/>
@@ -698,15 +698,15 @@
         </p:nvSpPr>
         <p:spPr>
           <a:xfrm>
-            <a:off x="1485828" y="943613"/>
-            <a:ext cx="8914968" cy="2007347"/>
+            <a:off x="1485933" y="1238674"/>
+            <a:ext cx="8915597" cy="2635030"/>
           </a:xfrm>
         </p:spPr>
         <p:txBody>
           <a:bodyPr anchor="b"/>
           <a:lstStyle>
             <a:lvl1pPr algn="ctr">
-              <a:defRPr sz="5050"/>
+              <a:defRPr sz="6630"/>
             </a:lvl1pPr>
           </a:lstStyle>
           <a:p>
@@ -730,8 +730,8 @@
         </p:nvSpPr>
         <p:spPr>
           <a:xfrm>
-            <a:off x="1485828" y="3028372"/>
-            <a:ext cx="8914968" cy="1392063"/>
+            <a:off x="1485933" y="3975322"/>
+            <a:ext cx="8915597" cy="1827351"/>
           </a:xfrm>
         </p:spPr>
         <p:txBody>
@@ -739,39 +739,39 @@
           <a:lstStyle>
             <a:lvl1pPr marL="0" indent="0" algn="ctr">
               <a:buNone/>
-              <a:defRPr sz="2025"/>
+              <a:defRPr sz="2655"/>
             </a:lvl1pPr>
-            <a:lvl2pPr marL="384175" indent="0" algn="ctr">
+            <a:lvl2pPr marL="504190" indent="0" algn="ctr">
               <a:buNone/>
-              <a:defRPr sz="1685"/>
+              <a:defRPr sz="2210"/>
             </a:lvl2pPr>
-            <a:lvl3pPr marL="767715" indent="0" algn="ctr">
+            <a:lvl3pPr marL="1007745" indent="0" algn="ctr">
               <a:buNone/>
-              <a:defRPr sz="1505"/>
+              <a:defRPr sz="1975"/>
             </a:lvl3pPr>
-            <a:lvl4pPr marL="1151890" indent="0" algn="ctr">
+            <a:lvl4pPr marL="1512570" indent="0" algn="ctr">
               <a:buNone/>
-              <a:defRPr sz="1345"/>
+              <a:defRPr sz="1765"/>
             </a:lvl4pPr>
-            <a:lvl5pPr marL="1538605" indent="0" algn="ctr">
+            <a:lvl5pPr marL="2019935" indent="0" algn="ctr">
               <a:buNone/>
-              <a:defRPr sz="1345"/>
+              <a:defRPr sz="1765"/>
             </a:lvl5pPr>
-            <a:lvl6pPr marL="1921510" indent="0" algn="ctr">
+            <a:lvl6pPr marL="2522220" indent="0" algn="ctr">
               <a:buNone/>
-              <a:defRPr sz="1345"/>
+              <a:defRPr sz="1765"/>
             </a:lvl6pPr>
-            <a:lvl7pPr marL="2305685" indent="0" algn="ctr">
+            <a:lvl7pPr marL="3026410" indent="0" algn="ctr">
               <a:buNone/>
-              <a:defRPr sz="1345"/>
+              <a:defRPr sz="1765"/>
             </a:lvl7pPr>
-            <a:lvl8pPr marL="2691765" indent="0" algn="ctr">
+            <a:lvl8pPr marL="3533140" indent="0" algn="ctr">
               <a:buNone/>
-              <a:defRPr sz="1345"/>
+              <a:defRPr sz="1765"/>
             </a:lvl8pPr>
-            <a:lvl9pPr marL="3073400" indent="0" algn="ctr">
+            <a:lvl9pPr marL="4034790" indent="0" algn="ctr">
               <a:buNone/>
-              <a:defRPr sz="1345"/>
+              <a:defRPr sz="1765"/>
             </a:lvl9pPr>
           </a:lstStyle>
           <a:p>
@@ -1050,8 +1050,8 @@
         </p:nvSpPr>
         <p:spPr>
           <a:xfrm>
-            <a:off x="8506363" y="306975"/>
-            <a:ext cx="2563053" cy="4886238"/>
+            <a:off x="8506963" y="402964"/>
+            <a:ext cx="2563234" cy="6414130"/>
           </a:xfrm>
         </p:spPr>
         <p:txBody>
@@ -1078,8 +1078,8 @@
         </p:nvSpPr>
         <p:spPr>
           <a:xfrm>
-            <a:off x="817204" y="306975"/>
-            <a:ext cx="7540577" cy="4886238"/>
+            <a:off x="817262" y="402964"/>
+            <a:ext cx="7541109" cy="6414130"/>
           </a:xfrm>
         </p:spPr>
         <p:txBody>
@@ -1394,15 +1394,15 @@
         </p:nvSpPr>
         <p:spPr>
           <a:xfrm>
-            <a:off x="811015" y="1437442"/>
-            <a:ext cx="10252211" cy="2398406"/>
+            <a:off x="811072" y="1886920"/>
+            <a:ext cx="10252935" cy="3148370"/>
           </a:xfrm>
         </p:spPr>
         <p:txBody>
           <a:bodyPr anchor="b"/>
           <a:lstStyle>
             <a:lvl1pPr>
-              <a:defRPr sz="5050"/>
+              <a:defRPr sz="6630"/>
             </a:lvl1pPr>
           </a:lstStyle>
           <a:p>
@@ -1426,8 +1426,8 @@
         </p:nvSpPr>
         <p:spPr>
           <a:xfrm>
-            <a:off x="811015" y="3858540"/>
-            <a:ext cx="10252211" cy="1261265"/>
+            <a:off x="811072" y="5065078"/>
+            <a:ext cx="10252935" cy="1655654"/>
           </a:xfrm>
         </p:spPr>
         <p:txBody>
@@ -1435,7 +1435,7 @@
           <a:lstStyle>
             <a:lvl1pPr marL="0" indent="0">
               <a:buNone/>
-              <a:defRPr sz="2025">
+              <a:defRPr sz="2655">
                 <a:solidFill>
                   <a:schemeClr val="tx1">
                     <a:tint val="75000"/>
@@ -1443,9 +1443,9 @@
                 </a:solidFill>
               </a:defRPr>
             </a:lvl1pPr>
-            <a:lvl2pPr marL="384175" indent="0">
+            <a:lvl2pPr marL="504190" indent="0">
               <a:buNone/>
-              <a:defRPr sz="1685">
+              <a:defRPr sz="2210">
                 <a:solidFill>
                   <a:schemeClr val="tx1">
                     <a:tint val="75000"/>
@@ -1453,9 +1453,9 @@
                 </a:solidFill>
               </a:defRPr>
             </a:lvl2pPr>
-            <a:lvl3pPr marL="767715" indent="0">
+            <a:lvl3pPr marL="1007745" indent="0">
               <a:buNone/>
-              <a:defRPr sz="1505">
+              <a:defRPr sz="1975">
                 <a:solidFill>
                   <a:schemeClr val="tx1">
                     <a:tint val="75000"/>
@@ -1463,9 +1463,9 @@
                 </a:solidFill>
               </a:defRPr>
             </a:lvl3pPr>
-            <a:lvl4pPr marL="1151890" indent="0">
+            <a:lvl4pPr marL="1512570" indent="0">
               <a:buNone/>
-              <a:defRPr sz="1345">
+              <a:defRPr sz="1765">
                 <a:solidFill>
                   <a:schemeClr val="tx1">
                     <a:tint val="75000"/>
@@ -1473,9 +1473,9 @@
                 </a:solidFill>
               </a:defRPr>
             </a:lvl4pPr>
-            <a:lvl5pPr marL="1538605" indent="0">
+            <a:lvl5pPr marL="2019935" indent="0">
               <a:buNone/>
-              <a:defRPr sz="1345">
+              <a:defRPr sz="1765">
                 <a:solidFill>
                   <a:schemeClr val="tx1">
                     <a:tint val="75000"/>
@@ -1483,9 +1483,9 @@
                 </a:solidFill>
               </a:defRPr>
             </a:lvl5pPr>
-            <a:lvl6pPr marL="1921510" indent="0">
+            <a:lvl6pPr marL="2522220" indent="0">
               <a:buNone/>
-              <a:defRPr sz="1345">
+              <a:defRPr sz="1765">
                 <a:solidFill>
                   <a:schemeClr val="tx1">
                     <a:tint val="75000"/>
@@ -1493,9 +1493,9 @@
                 </a:solidFill>
               </a:defRPr>
             </a:lvl6pPr>
-            <a:lvl7pPr marL="2305685" indent="0">
+            <a:lvl7pPr marL="3026410" indent="0">
               <a:buNone/>
-              <a:defRPr sz="1345">
+              <a:defRPr sz="1765">
                 <a:solidFill>
                   <a:schemeClr val="tx1">
                     <a:tint val="75000"/>
@@ -1503,9 +1503,9 @@
                 </a:solidFill>
               </a:defRPr>
             </a:lvl7pPr>
-            <a:lvl8pPr marL="2691765" indent="0">
+            <a:lvl8pPr marL="3533140" indent="0">
               <a:buNone/>
-              <a:defRPr sz="1345">
+              <a:defRPr sz="1765">
                 <a:solidFill>
                   <a:schemeClr val="tx1">
                     <a:tint val="75000"/>
@@ -1513,9 +1513,9 @@
                 </a:solidFill>
               </a:defRPr>
             </a:lvl8pPr>
-            <a:lvl9pPr marL="3073400" indent="0">
+            <a:lvl9pPr marL="4034790" indent="0">
               <a:buNone/>
-              <a:defRPr sz="1345">
+              <a:defRPr sz="1765">
                 <a:solidFill>
                   <a:schemeClr val="tx1">
                     <a:tint val="75000"/>
@@ -1657,8 +1657,8 @@
         </p:nvSpPr>
         <p:spPr>
           <a:xfrm>
-            <a:off x="817204" y="1534874"/>
-            <a:ext cx="5051815" cy="3658340"/>
+            <a:off x="817262" y="2014818"/>
+            <a:ext cx="5052172" cy="4802277"/>
           </a:xfrm>
         </p:spPr>
         <p:txBody>
@@ -1718,8 +1718,8 @@
         </p:nvSpPr>
         <p:spPr>
           <a:xfrm>
-            <a:off x="6017603" y="1534874"/>
-            <a:ext cx="5051815" cy="3658340"/>
+            <a:off x="6018028" y="2014818"/>
+            <a:ext cx="5052172" cy="4802277"/>
           </a:xfrm>
         </p:spPr>
         <p:txBody>
@@ -1867,8 +1867,8 @@
         </p:nvSpPr>
         <p:spPr>
           <a:xfrm>
-            <a:off x="818752" y="306975"/>
-            <a:ext cx="10252211" cy="1114453"/>
+            <a:off x="818810" y="402964"/>
+            <a:ext cx="10252935" cy="1462934"/>
           </a:xfrm>
         </p:spPr>
         <p:txBody>
@@ -1895,8 +1895,8 @@
         </p:nvSpPr>
         <p:spPr>
           <a:xfrm>
-            <a:off x="818752" y="1413419"/>
-            <a:ext cx="5028597" cy="692695"/>
+            <a:off x="818810" y="1855385"/>
+            <a:ext cx="5028952" cy="909296"/>
           </a:xfrm>
         </p:spPr>
         <p:txBody>
@@ -1904,39 +1904,39 @@
           <a:lstStyle>
             <a:lvl1pPr marL="0" indent="0">
               <a:buNone/>
-              <a:defRPr sz="2025" b="1"/>
+              <a:defRPr sz="2655" b="1"/>
             </a:lvl1pPr>
-            <a:lvl2pPr marL="384175" indent="0">
+            <a:lvl2pPr marL="504190" indent="0">
               <a:buNone/>
-              <a:defRPr sz="1685" b="1"/>
+              <a:defRPr sz="2210" b="1"/>
             </a:lvl2pPr>
-            <a:lvl3pPr marL="767715" indent="0">
+            <a:lvl3pPr marL="1007745" indent="0">
               <a:buNone/>
-              <a:defRPr sz="1505" b="1"/>
+              <a:defRPr sz="1975" b="1"/>
             </a:lvl3pPr>
-            <a:lvl4pPr marL="1151890" indent="0">
+            <a:lvl4pPr marL="1512570" indent="0">
               <a:buNone/>
-              <a:defRPr sz="1345" b="1"/>
+              <a:defRPr sz="1765" b="1"/>
             </a:lvl4pPr>
-            <a:lvl5pPr marL="1538605" indent="0">
+            <a:lvl5pPr marL="2019935" indent="0">
               <a:buNone/>
-              <a:defRPr sz="1345" b="1"/>
+              <a:defRPr sz="1765" b="1"/>
             </a:lvl5pPr>
-            <a:lvl6pPr marL="1921510" indent="0">
+            <a:lvl6pPr marL="2522220" indent="0">
               <a:buNone/>
-              <a:defRPr sz="1345" b="1"/>
+              <a:defRPr sz="1765" b="1"/>
             </a:lvl6pPr>
-            <a:lvl7pPr marL="2305685" indent="0">
+            <a:lvl7pPr marL="3026410" indent="0">
               <a:buNone/>
-              <a:defRPr sz="1345" b="1"/>
+              <a:defRPr sz="1765" b="1"/>
             </a:lvl7pPr>
-            <a:lvl8pPr marL="2691765" indent="0">
+            <a:lvl8pPr marL="3533140" indent="0">
               <a:buNone/>
-              <a:defRPr sz="1345" b="1"/>
+              <a:defRPr sz="1765" b="1"/>
             </a:lvl8pPr>
-            <a:lvl9pPr marL="3073400" indent="0">
+            <a:lvl9pPr marL="4034790" indent="0">
               <a:buNone/>
-              <a:defRPr sz="1345" b="1"/>
+              <a:defRPr sz="1765" b="1"/>
             </a:lvl9pPr>
           </a:lstStyle>
           <a:p>
@@ -1961,8 +1961,8 @@
         </p:nvSpPr>
         <p:spPr>
           <a:xfrm>
-            <a:off x="818752" y="2106114"/>
-            <a:ext cx="5028597" cy="3097777"/>
+            <a:off x="818810" y="2764681"/>
+            <a:ext cx="5028952" cy="4066430"/>
           </a:xfrm>
         </p:spPr>
         <p:txBody>
@@ -2022,8 +2022,8 @@
         </p:nvSpPr>
         <p:spPr>
           <a:xfrm>
-            <a:off x="6017603" y="1413419"/>
-            <a:ext cx="5053364" cy="692695"/>
+            <a:off x="6018028" y="1855385"/>
+            <a:ext cx="5053721" cy="909296"/>
           </a:xfrm>
         </p:spPr>
         <p:txBody>
@@ -2031,39 +2031,39 @@
           <a:lstStyle>
             <a:lvl1pPr marL="0" indent="0">
               <a:buNone/>
-              <a:defRPr sz="2025" b="1"/>
+              <a:defRPr sz="2655" b="1"/>
             </a:lvl1pPr>
-            <a:lvl2pPr marL="384175" indent="0">
+            <a:lvl2pPr marL="504190" indent="0">
               <a:buNone/>
-              <a:defRPr sz="1685" b="1"/>
+              <a:defRPr sz="2210" b="1"/>
             </a:lvl2pPr>
-            <a:lvl3pPr marL="767715" indent="0">
+            <a:lvl3pPr marL="1007745" indent="0">
               <a:buNone/>
-              <a:defRPr sz="1505" b="1"/>
+              <a:defRPr sz="1975" b="1"/>
             </a:lvl3pPr>
-            <a:lvl4pPr marL="1151890" indent="0">
+            <a:lvl4pPr marL="1512570" indent="0">
               <a:buNone/>
-              <a:defRPr sz="1345" b="1"/>
+              <a:defRPr sz="1765" b="1"/>
             </a:lvl4pPr>
-            <a:lvl5pPr marL="1538605" indent="0">
+            <a:lvl5pPr marL="2019935" indent="0">
               <a:buNone/>
-              <a:defRPr sz="1345" b="1"/>
+              <a:defRPr sz="1765" b="1"/>
             </a:lvl5pPr>
-            <a:lvl6pPr marL="1921510" indent="0">
+            <a:lvl6pPr marL="2522220" indent="0">
               <a:buNone/>
-              <a:defRPr sz="1345" b="1"/>
+              <a:defRPr sz="1765" b="1"/>
             </a:lvl6pPr>
-            <a:lvl7pPr marL="2305685" indent="0">
+            <a:lvl7pPr marL="3026410" indent="0">
               <a:buNone/>
-              <a:defRPr sz="1345" b="1"/>
+              <a:defRPr sz="1765" b="1"/>
             </a:lvl7pPr>
-            <a:lvl8pPr marL="2691765" indent="0">
+            <a:lvl8pPr marL="3533140" indent="0">
               <a:buNone/>
-              <a:defRPr sz="1345" b="1"/>
+              <a:defRPr sz="1765" b="1"/>
             </a:lvl8pPr>
-            <a:lvl9pPr marL="3073400" indent="0">
+            <a:lvl9pPr marL="4034790" indent="0">
               <a:buNone/>
-              <a:defRPr sz="1345" b="1"/>
+              <a:defRPr sz="1765" b="1"/>
             </a:lvl9pPr>
           </a:lstStyle>
           <a:p>
@@ -2088,8 +2088,8 @@
         </p:nvSpPr>
         <p:spPr>
           <a:xfrm>
-            <a:off x="6017603" y="2106114"/>
-            <a:ext cx="5053364" cy="3097777"/>
+            <a:off x="6018028" y="2764681"/>
+            <a:ext cx="5053721" cy="4066430"/>
           </a:xfrm>
         </p:spPr>
         <p:txBody>
@@ -2436,15 +2436,15 @@
         </p:nvSpPr>
         <p:spPr>
           <a:xfrm>
-            <a:off x="818752" y="384386"/>
-            <a:ext cx="3833745" cy="1345350"/>
+            <a:off x="818810" y="504581"/>
+            <a:ext cx="3834016" cy="1766031"/>
           </a:xfrm>
         </p:spPr>
         <p:txBody>
           <a:bodyPr anchor="b"/>
           <a:lstStyle>
             <a:lvl1pPr>
-              <a:defRPr sz="2685"/>
+              <a:defRPr sz="3525"/>
             </a:lvl1pPr>
           </a:lstStyle>
           <a:p>
@@ -2468,39 +2468,39 @@
         </p:nvSpPr>
         <p:spPr>
           <a:xfrm>
-            <a:off x="5053364" y="830166"/>
-            <a:ext cx="6017603" cy="4097445"/>
+            <a:off x="5053721" y="1089753"/>
+            <a:ext cx="6018028" cy="5378687"/>
           </a:xfrm>
         </p:spPr>
         <p:txBody>
           <a:bodyPr/>
           <a:lstStyle>
             <a:lvl1pPr>
-              <a:defRPr sz="2685"/>
+              <a:defRPr sz="3525"/>
             </a:lvl1pPr>
             <a:lvl2pPr>
-              <a:defRPr sz="2350"/>
+              <a:defRPr sz="3085"/>
             </a:lvl2pPr>
             <a:lvl3pPr>
-              <a:defRPr sz="2025"/>
+              <a:defRPr sz="2655"/>
             </a:lvl3pPr>
             <a:lvl4pPr>
-              <a:defRPr sz="1685"/>
+              <a:defRPr sz="2210"/>
             </a:lvl4pPr>
             <a:lvl5pPr>
-              <a:defRPr sz="1685"/>
+              <a:defRPr sz="2210"/>
             </a:lvl5pPr>
             <a:lvl6pPr>
-              <a:defRPr sz="1685"/>
+              <a:defRPr sz="2210"/>
             </a:lvl6pPr>
             <a:lvl7pPr>
-              <a:defRPr sz="1685"/>
+              <a:defRPr sz="2210"/>
             </a:lvl7pPr>
             <a:lvl8pPr>
-              <a:defRPr sz="1685"/>
+              <a:defRPr sz="2210"/>
             </a:lvl8pPr>
             <a:lvl9pPr>
-              <a:defRPr sz="1685"/>
+              <a:defRPr sz="2210"/>
             </a:lvl9pPr>
           </a:lstStyle>
           <a:p>
@@ -2557,8 +2557,8 @@
         </p:nvSpPr>
         <p:spPr>
           <a:xfrm>
-            <a:off x="818752" y="1729736"/>
-            <a:ext cx="3833745" cy="3204550"/>
+            <a:off x="818810" y="2270612"/>
+            <a:ext cx="3834016" cy="4206590"/>
           </a:xfrm>
         </p:spPr>
         <p:txBody>
@@ -2566,39 +2566,39 @@
           <a:lstStyle>
             <a:lvl1pPr marL="0" indent="0">
               <a:buNone/>
-              <a:defRPr sz="1345"/>
+              <a:defRPr sz="1765"/>
             </a:lvl1pPr>
-            <a:lvl2pPr marL="384175" indent="0">
+            <a:lvl2pPr marL="504190" indent="0">
               <a:buNone/>
-              <a:defRPr sz="1170"/>
+              <a:defRPr sz="1540"/>
             </a:lvl2pPr>
-            <a:lvl3pPr marL="767715" indent="0">
+            <a:lvl3pPr marL="1007745" indent="0">
               <a:buNone/>
-              <a:defRPr sz="1005"/>
+              <a:defRPr sz="1320"/>
             </a:lvl3pPr>
-            <a:lvl4pPr marL="1151890" indent="0">
+            <a:lvl4pPr marL="1512570" indent="0">
               <a:buNone/>
-              <a:defRPr sz="835"/>
+              <a:defRPr sz="1095"/>
             </a:lvl4pPr>
-            <a:lvl5pPr marL="1538605" indent="0">
+            <a:lvl5pPr marL="2019935" indent="0">
               <a:buNone/>
-              <a:defRPr sz="835"/>
+              <a:defRPr sz="1095"/>
             </a:lvl5pPr>
-            <a:lvl6pPr marL="1921510" indent="0">
+            <a:lvl6pPr marL="2522220" indent="0">
               <a:buNone/>
-              <a:defRPr sz="835"/>
+              <a:defRPr sz="1095"/>
             </a:lvl6pPr>
-            <a:lvl7pPr marL="2305685" indent="0">
+            <a:lvl7pPr marL="3026410" indent="0">
               <a:buNone/>
-              <a:defRPr sz="835"/>
+              <a:defRPr sz="1095"/>
             </a:lvl7pPr>
-            <a:lvl8pPr marL="2691765" indent="0">
+            <a:lvl8pPr marL="3533140" indent="0">
               <a:buNone/>
-              <a:defRPr sz="835"/>
+              <a:defRPr sz="1095"/>
             </a:lvl8pPr>
-            <a:lvl9pPr marL="3073400" indent="0">
+            <a:lvl9pPr marL="4034790" indent="0">
               <a:buNone/>
-              <a:defRPr sz="835"/>
+              <a:defRPr sz="1095"/>
             </a:lvl9pPr>
           </a:lstStyle>
           <a:p>
@@ -2711,15 +2711,15 @@
         </p:nvSpPr>
         <p:spPr>
           <a:xfrm>
-            <a:off x="818752" y="384386"/>
-            <a:ext cx="3833745" cy="1345350"/>
+            <a:off x="818810" y="504581"/>
+            <a:ext cx="3834016" cy="1766031"/>
           </a:xfrm>
         </p:spPr>
         <p:txBody>
           <a:bodyPr anchor="b"/>
           <a:lstStyle>
             <a:lvl1pPr>
-              <a:defRPr sz="2685"/>
+              <a:defRPr sz="3525"/>
             </a:lvl1pPr>
           </a:lstStyle>
           <a:p>
@@ -2743,8 +2743,8 @@
         </p:nvSpPr>
         <p:spPr>
           <a:xfrm>
-            <a:off x="5053364" y="830166"/>
-            <a:ext cx="6017603" cy="4097445"/>
+            <a:off x="5053721" y="1089753"/>
+            <a:ext cx="6018028" cy="5378687"/>
           </a:xfrm>
         </p:spPr>
         <p:txBody>
@@ -2752,39 +2752,39 @@
           <a:lstStyle>
             <a:lvl1pPr marL="0" indent="0">
               <a:buNone/>
-              <a:defRPr sz="2685"/>
+              <a:defRPr sz="3525"/>
             </a:lvl1pPr>
-            <a:lvl2pPr marL="384175" indent="0">
+            <a:lvl2pPr marL="504190" indent="0">
               <a:buNone/>
-              <a:defRPr sz="2350"/>
+              <a:defRPr sz="3085"/>
             </a:lvl2pPr>
-            <a:lvl3pPr marL="767715" indent="0">
+            <a:lvl3pPr marL="1007745" indent="0">
               <a:buNone/>
-              <a:defRPr sz="2025"/>
+              <a:defRPr sz="2655"/>
             </a:lvl3pPr>
-            <a:lvl4pPr marL="1151890" indent="0">
+            <a:lvl4pPr marL="1512570" indent="0">
               <a:buNone/>
-              <a:defRPr sz="1685"/>
+              <a:defRPr sz="2210"/>
             </a:lvl4pPr>
-            <a:lvl5pPr marL="1538605" indent="0">
+            <a:lvl5pPr marL="2019935" indent="0">
               <a:buNone/>
-              <a:defRPr sz="1685"/>
+              <a:defRPr sz="2210"/>
             </a:lvl5pPr>
-            <a:lvl6pPr marL="1921510" indent="0">
+            <a:lvl6pPr marL="2522220" indent="0">
               <a:buNone/>
-              <a:defRPr sz="1685"/>
+              <a:defRPr sz="2210"/>
             </a:lvl6pPr>
-            <a:lvl7pPr marL="2305685" indent="0">
+            <a:lvl7pPr marL="3026410" indent="0">
               <a:buNone/>
-              <a:defRPr sz="1685"/>
+              <a:defRPr sz="2210"/>
             </a:lvl7pPr>
-            <a:lvl8pPr marL="2691765" indent="0">
+            <a:lvl8pPr marL="3533140" indent="0">
               <a:buNone/>
-              <a:defRPr sz="1685"/>
+              <a:defRPr sz="2210"/>
             </a:lvl8pPr>
-            <a:lvl9pPr marL="3073400" indent="0">
+            <a:lvl9pPr marL="4034790" indent="0">
               <a:buNone/>
-              <a:defRPr sz="1685"/>
+              <a:defRPr sz="2210"/>
             </a:lvl9pPr>
           </a:lstStyle>
           <a:p>
@@ -2804,8 +2804,8 @@
         </p:nvSpPr>
         <p:spPr>
           <a:xfrm>
-            <a:off x="818752" y="1729736"/>
-            <a:ext cx="3833745" cy="3204550"/>
+            <a:off x="818810" y="2270612"/>
+            <a:ext cx="3834016" cy="4206590"/>
           </a:xfrm>
         </p:spPr>
         <p:txBody>
@@ -2813,39 +2813,39 @@
           <a:lstStyle>
             <a:lvl1pPr marL="0" indent="0">
               <a:buNone/>
-              <a:defRPr sz="1345"/>
+              <a:defRPr sz="1765"/>
             </a:lvl1pPr>
-            <a:lvl2pPr marL="384175" indent="0">
+            <a:lvl2pPr marL="504190" indent="0">
               <a:buNone/>
-              <a:defRPr sz="1170"/>
+              <a:defRPr sz="1540"/>
             </a:lvl2pPr>
-            <a:lvl3pPr marL="767715" indent="0">
+            <a:lvl3pPr marL="1007745" indent="0">
               <a:buNone/>
-              <a:defRPr sz="1005"/>
+              <a:defRPr sz="1320"/>
             </a:lvl3pPr>
-            <a:lvl4pPr marL="1151890" indent="0">
+            <a:lvl4pPr marL="1512570" indent="0">
               <a:buNone/>
-              <a:defRPr sz="835"/>
+              <a:defRPr sz="1095"/>
             </a:lvl4pPr>
-            <a:lvl5pPr marL="1538605" indent="0">
+            <a:lvl5pPr marL="2019935" indent="0">
               <a:buNone/>
-              <a:defRPr sz="835"/>
+              <a:defRPr sz="1095"/>
             </a:lvl5pPr>
-            <a:lvl6pPr marL="1921510" indent="0">
+            <a:lvl6pPr marL="2522220" indent="0">
               <a:buNone/>
-              <a:defRPr sz="835"/>
+              <a:defRPr sz="1095"/>
             </a:lvl6pPr>
-            <a:lvl7pPr marL="2305685" indent="0">
+            <a:lvl7pPr marL="3026410" indent="0">
               <a:buNone/>
-              <a:defRPr sz="835"/>
+              <a:defRPr sz="1095"/>
             </a:lvl7pPr>
-            <a:lvl8pPr marL="2691765" indent="0">
+            <a:lvl8pPr marL="3533140" indent="0">
               <a:buNone/>
-              <a:defRPr sz="835"/>
+              <a:defRPr sz="1095"/>
             </a:lvl8pPr>
-            <a:lvl9pPr marL="3073400" indent="0">
+            <a:lvl9pPr marL="4034790" indent="0">
               <a:buNone/>
-              <a:defRPr sz="835"/>
+              <a:defRPr sz="1095"/>
             </a:lvl9pPr>
           </a:lstStyle>
           <a:p>
@@ -2963,8 +2963,8 @@
         </p:nvSpPr>
         <p:spPr>
           <a:xfrm>
-            <a:off x="817204" y="306975"/>
-            <a:ext cx="10252211" cy="1114453"/>
+            <a:off x="817262" y="402964"/>
+            <a:ext cx="10252935" cy="1462934"/>
           </a:xfrm>
           <a:prstGeom prst="rect">
             <a:avLst/>
@@ -2996,8 +2996,8 @@
         </p:nvSpPr>
         <p:spPr>
           <a:xfrm>
-            <a:off x="817204" y="1534874"/>
-            <a:ext cx="10252211" cy="3658340"/>
+            <a:off x="817262" y="2014818"/>
+            <a:ext cx="10252935" cy="4802277"/>
           </a:xfrm>
           <a:prstGeom prst="rect">
             <a:avLst/>
@@ -3062,8 +3062,8 @@
         </p:nvSpPr>
         <p:spPr>
           <a:xfrm>
-            <a:off x="817204" y="5344030"/>
-            <a:ext cx="2674489" cy="306975"/>
+            <a:off x="817262" y="7015070"/>
+            <a:ext cx="2674678" cy="402964"/>
           </a:xfrm>
           <a:prstGeom prst="rect">
             <a:avLst/>
@@ -3073,7 +3073,7 @@
           <a:bodyPr vert="horz" lIns="91440" tIns="45720" rIns="91440" bIns="45720" rtlCol="0" anchor="ctr"/>
           <a:lstStyle>
             <a:lvl1pPr algn="l">
-              <a:defRPr sz="1005">
+              <a:defRPr sz="1320">
                 <a:solidFill>
                   <a:schemeClr val="tx1">
                     <a:tint val="75000"/>
@@ -3102,8 +3102,8 @@
         </p:nvSpPr>
         <p:spPr>
           <a:xfrm>
-            <a:off x="3937446" y="5344030"/>
-            <a:ext cx="4011733" cy="306975"/>
+            <a:off x="3937724" y="7015070"/>
+            <a:ext cx="4012016" cy="402964"/>
           </a:xfrm>
           <a:prstGeom prst="rect">
             <a:avLst/>
@@ -3113,7 +3113,7 @@
           <a:bodyPr vert="horz" lIns="91440" tIns="45720" rIns="91440" bIns="45720" rtlCol="0" anchor="ctr"/>
           <a:lstStyle>
             <a:lvl1pPr algn="ctr">
-              <a:defRPr sz="1005">
+              <a:defRPr sz="1320">
                 <a:solidFill>
                   <a:schemeClr val="tx1">
                     <a:tint val="75000"/>
@@ -3139,8 +3139,8 @@
         </p:nvSpPr>
         <p:spPr>
           <a:xfrm>
-            <a:off x="8394927" y="5344030"/>
-            <a:ext cx="2674489" cy="306975"/>
+            <a:off x="8395519" y="7015070"/>
+            <a:ext cx="2674678" cy="402964"/>
           </a:xfrm>
           <a:prstGeom prst="rect">
             <a:avLst/>
@@ -3150,7 +3150,7 @@
           <a:bodyPr vert="horz" lIns="91440" tIns="45720" rIns="91440" bIns="45720" rtlCol="0" anchor="ctr"/>
           <a:lstStyle>
             <a:lvl1pPr algn="r">
-              <a:defRPr sz="1005">
+              <a:defRPr sz="1320">
                 <a:solidFill>
                   <a:schemeClr val="tx1">
                     <a:tint val="75000"/>
@@ -3185,7 +3185,7 @@
   </p:sldLayoutIdLst>
   <p:txStyles>
     <p:titleStyle>
-      <a:lvl1pPr algn="l" defTabSz="767715" rtl="0" eaLnBrk="1" latinLnBrk="0" hangingPunct="1">
+      <a:lvl1pPr algn="l" defTabSz="1007745" rtl="0" eaLnBrk="1" latinLnBrk="0" hangingPunct="1">
         <a:lnSpc>
           <a:spcPct val="90000"/>
         </a:lnSpc>
@@ -3193,7 +3193,7 @@
           <a:spcPct val="0"/>
         </a:spcBef>
         <a:buNone/>
-        <a:defRPr sz="3705" kern="1200">
+        <a:defRPr sz="4860" kern="1200">
           <a:solidFill>
             <a:schemeClr val="tx1"/>
           </a:solidFill>
@@ -3204,16 +3204,16 @@
       </a:lvl1pPr>
     </p:titleStyle>
     <p:bodyStyle>
-      <a:lvl1pPr marL="191135" indent="-191135" algn="l" defTabSz="767715" rtl="0" eaLnBrk="1" latinLnBrk="0" hangingPunct="1">
+      <a:lvl1pPr marL="250825" indent="-250825" algn="l" defTabSz="1007745" rtl="0" eaLnBrk="1" latinLnBrk="0" hangingPunct="1">
         <a:lnSpc>
           <a:spcPct val="90000"/>
         </a:lnSpc>
         <a:spcBef>
-          <a:spcPts val="835"/>
+          <a:spcPct val="220000"/>
         </a:spcBef>
         <a:buFont typeface="Arial" panose="020B0604020202020204" pitchFamily="34" charset="0"/>
         <a:buChar char="•"/>
-        <a:defRPr sz="2350" kern="1200">
+        <a:defRPr sz="3085" kern="1200">
           <a:solidFill>
             <a:schemeClr val="tx1"/>
           </a:solidFill>
@@ -3222,16 +3222,16 @@
           <a:cs typeface="+mn-cs"/>
         </a:defRPr>
       </a:lvl1pPr>
-      <a:lvl2pPr marL="577215" indent="-191135" algn="l" defTabSz="767715" rtl="0" eaLnBrk="1" latinLnBrk="0" hangingPunct="1">
+      <a:lvl2pPr marL="757555" indent="-250825" algn="l" defTabSz="1007745" rtl="0" eaLnBrk="1" latinLnBrk="0" hangingPunct="1">
         <a:lnSpc>
           <a:spcPct val="90000"/>
         </a:lnSpc>
         <a:spcBef>
-          <a:spcPts val="415"/>
+          <a:spcPts val="545"/>
         </a:spcBef>
         <a:buFont typeface="Arial" panose="020B0604020202020204" pitchFamily="34" charset="0"/>
         <a:buChar char="•"/>
-        <a:defRPr sz="2025" kern="1200">
+        <a:defRPr sz="2655" kern="1200">
           <a:solidFill>
             <a:schemeClr val="tx1"/>
           </a:solidFill>
@@ -3240,16 +3240,16 @@
           <a:cs typeface="+mn-cs"/>
         </a:defRPr>
       </a:lvl2pPr>
-      <a:lvl3pPr marL="960120" indent="-191135" algn="l" defTabSz="767715" rtl="0" eaLnBrk="1" latinLnBrk="0" hangingPunct="1">
+      <a:lvl3pPr marL="1260475" indent="-250825" algn="l" defTabSz="1007745" rtl="0" eaLnBrk="1" latinLnBrk="0" hangingPunct="1">
         <a:lnSpc>
           <a:spcPct val="90000"/>
         </a:lnSpc>
         <a:spcBef>
-          <a:spcPts val="415"/>
+          <a:spcPts val="545"/>
         </a:spcBef>
         <a:buFont typeface="Arial" panose="020B0604020202020204" pitchFamily="34" charset="0"/>
         <a:buChar char="•"/>
-        <a:defRPr sz="1685" kern="1200">
+        <a:defRPr sz="2210" kern="1200">
           <a:solidFill>
             <a:schemeClr val="tx1"/>
           </a:solidFill>
@@ -3258,16 +3258,16 @@
           <a:cs typeface="+mn-cs"/>
         </a:defRPr>
       </a:lvl3pPr>
-      <a:lvl4pPr marL="1344930" indent="-191135" algn="l" defTabSz="767715" rtl="0" eaLnBrk="1" latinLnBrk="0" hangingPunct="1">
+      <a:lvl4pPr marL="1765935" indent="-250825" algn="l" defTabSz="1007745" rtl="0" eaLnBrk="1" latinLnBrk="0" hangingPunct="1">
         <a:lnSpc>
           <a:spcPct val="90000"/>
         </a:lnSpc>
         <a:spcBef>
-          <a:spcPts val="415"/>
+          <a:spcPts val="545"/>
         </a:spcBef>
         <a:buFont typeface="Arial" panose="020B0604020202020204" pitchFamily="34" charset="0"/>
         <a:buChar char="•"/>
-        <a:defRPr sz="1505" kern="1200">
+        <a:defRPr sz="1975" kern="1200">
           <a:solidFill>
             <a:schemeClr val="tx1"/>
           </a:solidFill>
@@ -3276,16 +3276,16 @@
           <a:cs typeface="+mn-cs"/>
         </a:defRPr>
       </a:lvl4pPr>
-      <a:lvl5pPr marL="1728470" indent="-191135" algn="l" defTabSz="767715" rtl="0" eaLnBrk="1" latinLnBrk="0" hangingPunct="1">
+      <a:lvl5pPr marL="2268855" indent="-250825" algn="l" defTabSz="1007745" rtl="0" eaLnBrk="1" latinLnBrk="0" hangingPunct="1">
         <a:lnSpc>
           <a:spcPct val="90000"/>
         </a:lnSpc>
         <a:spcBef>
-          <a:spcPts val="415"/>
+          <a:spcPts val="545"/>
         </a:spcBef>
         <a:buFont typeface="Arial" panose="020B0604020202020204" pitchFamily="34" charset="0"/>
         <a:buChar char="•"/>
-        <a:defRPr sz="1505" kern="1200">
+        <a:defRPr sz="1975" kern="1200">
           <a:solidFill>
             <a:schemeClr val="tx1"/>
           </a:solidFill>
@@ -3294,16 +3294,16 @@
           <a:cs typeface="+mn-cs"/>
         </a:defRPr>
       </a:lvl5pPr>
-      <a:lvl6pPr marL="2113280" indent="-191135" algn="l" defTabSz="767715" rtl="0" eaLnBrk="1" latinLnBrk="0" hangingPunct="1">
+      <a:lvl6pPr marL="2773680" indent="-250825" algn="l" defTabSz="1007745" rtl="0" eaLnBrk="1" latinLnBrk="0" hangingPunct="1">
         <a:lnSpc>
           <a:spcPct val="90000"/>
         </a:lnSpc>
         <a:spcBef>
-          <a:spcPts val="415"/>
+          <a:spcPts val="545"/>
         </a:spcBef>
         <a:buFont typeface="Arial" panose="020B0604020202020204" pitchFamily="34" charset="0"/>
         <a:buChar char="•"/>
-        <a:defRPr sz="1505" kern="1200">
+        <a:defRPr sz="1975" kern="1200">
           <a:solidFill>
             <a:schemeClr val="tx1"/>
           </a:solidFill>
@@ -3312,16 +3312,16 @@
           <a:cs typeface="+mn-cs"/>
         </a:defRPr>
       </a:lvl6pPr>
-      <a:lvl7pPr marL="2498090" indent="-191135" algn="l" defTabSz="767715" rtl="0" eaLnBrk="1" latinLnBrk="0" hangingPunct="1">
+      <a:lvl7pPr marL="3279140" indent="-250825" algn="l" defTabSz="1007745" rtl="0" eaLnBrk="1" latinLnBrk="0" hangingPunct="1">
         <a:lnSpc>
           <a:spcPct val="90000"/>
         </a:lnSpc>
         <a:spcBef>
-          <a:spcPts val="415"/>
+          <a:spcPts val="545"/>
         </a:spcBef>
         <a:buFont typeface="Arial" panose="020B0604020202020204" pitchFamily="34" charset="0"/>
         <a:buChar char="•"/>
-        <a:defRPr sz="1505" kern="1200">
+        <a:defRPr sz="1975" kern="1200">
           <a:solidFill>
             <a:schemeClr val="tx1"/>
           </a:solidFill>
@@ -3330,16 +3330,16 @@
           <a:cs typeface="+mn-cs"/>
         </a:defRPr>
       </a:lvl7pPr>
-      <a:lvl8pPr marL="2880995" indent="-191135" algn="l" defTabSz="767715" rtl="0" eaLnBrk="1" latinLnBrk="0" hangingPunct="1">
+      <a:lvl8pPr marL="3782060" indent="-250825" algn="l" defTabSz="1007745" rtl="0" eaLnBrk="1" latinLnBrk="0" hangingPunct="1">
         <a:lnSpc>
           <a:spcPct val="90000"/>
         </a:lnSpc>
         <a:spcBef>
-          <a:spcPts val="415"/>
+          <a:spcPts val="545"/>
         </a:spcBef>
         <a:buFont typeface="Arial" panose="020B0604020202020204" pitchFamily="34" charset="0"/>
         <a:buChar char="•"/>
-        <a:defRPr sz="1505" kern="1200">
+        <a:defRPr sz="1975" kern="1200">
           <a:solidFill>
             <a:schemeClr val="tx1"/>
           </a:solidFill>
@@ -3348,16 +3348,16 @@
           <a:cs typeface="+mn-cs"/>
         </a:defRPr>
       </a:lvl8pPr>
-      <a:lvl9pPr marL="3265805" indent="-191135" algn="l" defTabSz="767715" rtl="0" eaLnBrk="1" latinLnBrk="0" hangingPunct="1">
+      <a:lvl9pPr marL="4286885" indent="-250825" algn="l" defTabSz="1007745" rtl="0" eaLnBrk="1" latinLnBrk="0" hangingPunct="1">
         <a:lnSpc>
           <a:spcPct val="90000"/>
         </a:lnSpc>
         <a:spcBef>
-          <a:spcPts val="415"/>
+          <a:spcPts val="545"/>
         </a:spcBef>
         <a:buFont typeface="Arial" panose="020B0604020202020204" pitchFamily="34" charset="0"/>
         <a:buChar char="•"/>
-        <a:defRPr sz="1505" kern="1200">
+        <a:defRPr sz="1975" kern="1200">
           <a:solidFill>
             <a:schemeClr val="tx1"/>
           </a:solidFill>
@@ -3371,8 +3371,8 @@
       <a:defPPr>
         <a:defRPr lang="zh-CN"/>
       </a:defPPr>
-      <a:lvl1pPr marL="0" algn="l" defTabSz="767715" rtl="0" eaLnBrk="1" latinLnBrk="0" hangingPunct="1">
-        <a:defRPr sz="1505" kern="1200">
+      <a:lvl1pPr marL="0" algn="l" defTabSz="1007745" rtl="0" eaLnBrk="1" latinLnBrk="0" hangingPunct="1">
+        <a:defRPr sz="1975" kern="1200">
           <a:solidFill>
             <a:schemeClr val="tx1"/>
           </a:solidFill>
@@ -3381,8 +3381,8 @@
           <a:cs typeface="+mn-cs"/>
         </a:defRPr>
       </a:lvl1pPr>
-      <a:lvl2pPr marL="384175" algn="l" defTabSz="767715" rtl="0" eaLnBrk="1" latinLnBrk="0" hangingPunct="1">
-        <a:defRPr sz="1505" kern="1200">
+      <a:lvl2pPr marL="504190" algn="l" defTabSz="1007745" rtl="0" eaLnBrk="1" latinLnBrk="0" hangingPunct="1">
+        <a:defRPr sz="1975" kern="1200">
           <a:solidFill>
             <a:schemeClr val="tx1"/>
           </a:solidFill>
@@ -3391,8 +3391,8 @@
           <a:cs typeface="+mn-cs"/>
         </a:defRPr>
       </a:lvl2pPr>
-      <a:lvl3pPr marL="767715" algn="l" defTabSz="767715" rtl="0" eaLnBrk="1" latinLnBrk="0" hangingPunct="1">
-        <a:defRPr sz="1505" kern="1200">
+      <a:lvl3pPr marL="1007745" algn="l" defTabSz="1007745" rtl="0" eaLnBrk="1" latinLnBrk="0" hangingPunct="1">
+        <a:defRPr sz="1975" kern="1200">
           <a:solidFill>
             <a:schemeClr val="tx1"/>
           </a:solidFill>
@@ -3401,8 +3401,8 @@
           <a:cs typeface="+mn-cs"/>
         </a:defRPr>
       </a:lvl3pPr>
-      <a:lvl4pPr marL="1151890" algn="l" defTabSz="767715" rtl="0" eaLnBrk="1" latinLnBrk="0" hangingPunct="1">
-        <a:defRPr sz="1505" kern="1200">
+      <a:lvl4pPr marL="1512570" algn="l" defTabSz="1007745" rtl="0" eaLnBrk="1" latinLnBrk="0" hangingPunct="1">
+        <a:defRPr sz="1975" kern="1200">
           <a:solidFill>
             <a:schemeClr val="tx1"/>
           </a:solidFill>
@@ -3411,8 +3411,8 @@
           <a:cs typeface="+mn-cs"/>
         </a:defRPr>
       </a:lvl4pPr>
-      <a:lvl5pPr marL="1538605" algn="l" defTabSz="767715" rtl="0" eaLnBrk="1" latinLnBrk="0" hangingPunct="1">
-        <a:defRPr sz="1505" kern="1200">
+      <a:lvl5pPr marL="2019935" algn="l" defTabSz="1007745" rtl="0" eaLnBrk="1" latinLnBrk="0" hangingPunct="1">
+        <a:defRPr sz="1975" kern="1200">
           <a:solidFill>
             <a:schemeClr val="tx1"/>
           </a:solidFill>
@@ -3421,8 +3421,8 @@
           <a:cs typeface="+mn-cs"/>
         </a:defRPr>
       </a:lvl5pPr>
-      <a:lvl6pPr marL="1921510" algn="l" defTabSz="767715" rtl="0" eaLnBrk="1" latinLnBrk="0" hangingPunct="1">
-        <a:defRPr sz="1505" kern="1200">
+      <a:lvl6pPr marL="2522220" algn="l" defTabSz="1007745" rtl="0" eaLnBrk="1" latinLnBrk="0" hangingPunct="1">
+        <a:defRPr sz="1975" kern="1200">
           <a:solidFill>
             <a:schemeClr val="tx1"/>
           </a:solidFill>
@@ -3431,8 +3431,8 @@
           <a:cs typeface="+mn-cs"/>
         </a:defRPr>
       </a:lvl6pPr>
-      <a:lvl7pPr marL="2305685" algn="l" defTabSz="767715" rtl="0" eaLnBrk="1" latinLnBrk="0" hangingPunct="1">
-        <a:defRPr sz="1505" kern="1200">
+      <a:lvl7pPr marL="3026410" algn="l" defTabSz="1007745" rtl="0" eaLnBrk="1" latinLnBrk="0" hangingPunct="1">
+        <a:defRPr sz="1975" kern="1200">
           <a:solidFill>
             <a:schemeClr val="tx1"/>
           </a:solidFill>
@@ -3441,8 +3441,8 @@
           <a:cs typeface="+mn-cs"/>
         </a:defRPr>
       </a:lvl7pPr>
-      <a:lvl8pPr marL="2691765" algn="l" defTabSz="767715" rtl="0" eaLnBrk="1" latinLnBrk="0" hangingPunct="1">
-        <a:defRPr sz="1505" kern="1200">
+      <a:lvl8pPr marL="3533140" algn="l" defTabSz="1007745" rtl="0" eaLnBrk="1" latinLnBrk="0" hangingPunct="1">
+        <a:defRPr sz="1975" kern="1200">
           <a:solidFill>
             <a:schemeClr val="tx1"/>
           </a:solidFill>
@@ -3451,8 +3451,8 @@
           <a:cs typeface="+mn-cs"/>
         </a:defRPr>
       </a:lvl8pPr>
-      <a:lvl9pPr marL="3073400" algn="l" defTabSz="767715" rtl="0" eaLnBrk="1" latinLnBrk="0" hangingPunct="1">
-        <a:defRPr sz="1505" kern="1200">
+      <a:lvl9pPr marL="4034790" algn="l" defTabSz="1007745" rtl="0" eaLnBrk="1" latinLnBrk="0" hangingPunct="1">
+        <a:defRPr sz="1975" kern="1200">
           <a:solidFill>
             <a:schemeClr val="tx1"/>
           </a:solidFill>
@@ -3478,16 +3478,14 @@
       <p:grpSpPr/>
       <p:cxnSp>
         <p:nvCxnSpPr>
-          <p:cNvPr id="59" name="直接箭头连接符 13"/>
-          <p:cNvCxnSpPr>
-            <a:endCxn id="48" idx="1"/>
-          </p:cNvCxnSpPr>
+          <p:cNvPr id="2" name="直接箭头连接符 13"/>
+          <p:cNvCxnSpPr/>
           <p:nvPr/>
         </p:nvCxnSpPr>
         <p:spPr>
           <a:xfrm>
-            <a:off x="1033291" y="4845460"/>
-            <a:ext cx="543560" cy="0"/>
+            <a:off x="1033364" y="5704790"/>
+            <a:ext cx="543598" cy="0"/>
           </a:xfrm>
           <a:prstGeom prst="straightConnector1">
             <a:avLst/>
@@ -3505,16 +3503,14 @@
       </p:cxnSp>
       <p:cxnSp>
         <p:nvCxnSpPr>
-          <p:cNvPr id="58" name="直接箭头连接符 13"/>
-          <p:cNvCxnSpPr>
-            <a:endCxn id="47" idx="1"/>
-          </p:cNvCxnSpPr>
+          <p:cNvPr id="28" name="直接箭头连接符 13"/>
+          <p:cNvCxnSpPr/>
           <p:nvPr/>
         </p:nvCxnSpPr>
         <p:spPr>
           <a:xfrm>
-            <a:off x="1009161" y="3845970"/>
-            <a:ext cx="567690" cy="4445"/>
+            <a:off x="8332840" y="6584869"/>
+            <a:ext cx="382296" cy="0"/>
           </a:xfrm>
           <a:prstGeom prst="straightConnector1">
             <a:avLst/>
@@ -3532,14 +3528,14 @@
       </p:cxnSp>
       <p:cxnSp>
         <p:nvCxnSpPr>
-          <p:cNvPr id="57" name="直接箭头连接符 13"/>
+          <p:cNvPr id="27" name="直接箭头连接符 13"/>
           <p:cNvCxnSpPr/>
           <p:nvPr/>
         </p:nvCxnSpPr>
         <p:spPr>
           <a:xfrm>
-            <a:off x="894226" y="2843940"/>
-            <a:ext cx="682625" cy="5715"/>
+            <a:off x="6505181" y="6584869"/>
+            <a:ext cx="351814" cy="0"/>
           </a:xfrm>
           <a:prstGeom prst="straightConnector1">
             <a:avLst/>
@@ -3557,14 +3553,14 @@
       </p:cxnSp>
       <p:cxnSp>
         <p:nvCxnSpPr>
-          <p:cNvPr id="55" name="直接箭头连接符 13"/>
+          <p:cNvPr id="23" name="直接箭头连接符 13"/>
           <p:cNvCxnSpPr/>
           <p:nvPr/>
         </p:nvCxnSpPr>
         <p:spPr>
-          <a:xfrm flipV="1">
-            <a:off x="1034561" y="488725"/>
-            <a:ext cx="542290" cy="1270"/>
+          <a:xfrm>
+            <a:off x="3712888" y="6584869"/>
+            <a:ext cx="344194" cy="0"/>
           </a:xfrm>
           <a:prstGeom prst="straightConnector1">
             <a:avLst/>
@@ -3582,14 +3578,14 @@
       </p:cxnSp>
       <p:cxnSp>
         <p:nvCxnSpPr>
-          <p:cNvPr id="56" name="直接箭头连接符 13"/>
+          <p:cNvPr id="22" name="直接箭头连接符 13"/>
           <p:cNvCxnSpPr/>
           <p:nvPr/>
         </p:nvCxnSpPr>
         <p:spPr>
-          <a:xfrm flipV="1">
-            <a:off x="1041546" y="1937160"/>
-            <a:ext cx="535305" cy="635"/>
+          <a:xfrm>
+            <a:off x="1033364" y="6584869"/>
+            <a:ext cx="543598" cy="0"/>
           </a:xfrm>
           <a:prstGeom prst="straightConnector1">
             <a:avLst/>
@@ -3607,14 +3603,14 @@
       </p:cxnSp>
       <p:cxnSp>
         <p:nvCxnSpPr>
-          <p:cNvPr id="25" name="直接箭头连接符 13"/>
+          <p:cNvPr id="59" name="直接箭头连接符 13"/>
           <p:cNvCxnSpPr/>
           <p:nvPr/>
         </p:nvCxnSpPr>
         <p:spPr>
           <a:xfrm>
-            <a:off x="3712626" y="488662"/>
-            <a:ext cx="344170" cy="0"/>
+            <a:off x="1033364" y="4824015"/>
+            <a:ext cx="543598" cy="0"/>
           </a:xfrm>
           <a:prstGeom prst="straightConnector1">
             <a:avLst/>
@@ -3630,6 +3626,133 @@
           </a:ln>
         </p:spPr>
       </p:cxnSp>
+      <p:cxnSp>
+        <p:nvCxnSpPr>
+          <p:cNvPr id="58" name="直接箭头连接符 13"/>
+          <p:cNvCxnSpPr>
+            <a:endCxn id="47" idx="1"/>
+          </p:cNvCxnSpPr>
+          <p:nvPr/>
+        </p:nvCxnSpPr>
+        <p:spPr>
+          <a:xfrm>
+            <a:off x="1009232" y="3824454"/>
+            <a:ext cx="567730" cy="4445"/>
+          </a:xfrm>
+          <a:prstGeom prst="straightConnector1">
+            <a:avLst/>
+          </a:prstGeom>
+          <a:ln w="25400" cap="flat" cmpd="sng">
+            <a:solidFill>
+              <a:srgbClr val="000000"/>
+            </a:solidFill>
+            <a:prstDash val="solid"/>
+            <a:round/>
+            <a:headEnd type="none" w="med" len="med"/>
+            <a:tailEnd type="arrow" w="sm" len="lg"/>
+          </a:ln>
+        </p:spPr>
+      </p:cxnSp>
+      <p:cxnSp>
+        <p:nvCxnSpPr>
+          <p:cNvPr id="57" name="直接箭头连接符 13"/>
+          <p:cNvCxnSpPr/>
+          <p:nvPr/>
+        </p:nvCxnSpPr>
+        <p:spPr>
+          <a:xfrm>
+            <a:off x="894289" y="2822353"/>
+            <a:ext cx="682673" cy="5715"/>
+          </a:xfrm>
+          <a:prstGeom prst="straightConnector1">
+            <a:avLst/>
+          </a:prstGeom>
+          <a:ln w="25400" cap="flat" cmpd="sng">
+            <a:solidFill>
+              <a:srgbClr val="000000"/>
+            </a:solidFill>
+            <a:prstDash val="solid"/>
+            <a:round/>
+            <a:headEnd type="none" w="med" len="med"/>
+            <a:tailEnd type="arrow" w="sm" len="lg"/>
+          </a:ln>
+        </p:spPr>
+      </p:cxnSp>
+      <p:cxnSp>
+        <p:nvCxnSpPr>
+          <p:cNvPr id="55" name="直接箭头连接符 13"/>
+          <p:cNvCxnSpPr/>
+          <p:nvPr/>
+        </p:nvCxnSpPr>
+        <p:spPr>
+          <a:xfrm flipV="1">
+            <a:off x="1034634" y="466972"/>
+            <a:ext cx="542328" cy="1270"/>
+          </a:xfrm>
+          <a:prstGeom prst="straightConnector1">
+            <a:avLst/>
+          </a:prstGeom>
+          <a:ln w="25400" cap="flat" cmpd="sng">
+            <a:solidFill>
+              <a:srgbClr val="000000"/>
+            </a:solidFill>
+            <a:prstDash val="solid"/>
+            <a:round/>
+            <a:headEnd type="none" w="med" len="med"/>
+            <a:tailEnd type="arrow" w="sm" len="lg"/>
+          </a:ln>
+        </p:spPr>
+      </p:cxnSp>
+      <p:cxnSp>
+        <p:nvCxnSpPr>
+          <p:cNvPr id="56" name="直接箭头连接符 13"/>
+          <p:cNvCxnSpPr/>
+          <p:nvPr/>
+        </p:nvCxnSpPr>
+        <p:spPr>
+          <a:xfrm flipV="1">
+            <a:off x="1041620" y="1915509"/>
+            <a:ext cx="535343" cy="635"/>
+          </a:xfrm>
+          <a:prstGeom prst="straightConnector1">
+            <a:avLst/>
+          </a:prstGeom>
+          <a:ln w="25400" cap="flat" cmpd="sng">
+            <a:solidFill>
+              <a:srgbClr val="000000"/>
+            </a:solidFill>
+            <a:prstDash val="solid"/>
+            <a:round/>
+            <a:headEnd type="none" w="med" len="med"/>
+            <a:tailEnd type="arrow" w="sm" len="lg"/>
+          </a:ln>
+        </p:spPr>
+      </p:cxnSp>
+      <p:cxnSp>
+        <p:nvCxnSpPr>
+          <p:cNvPr id="25" name="直接箭头连接符 13"/>
+          <p:cNvCxnSpPr/>
+          <p:nvPr/>
+        </p:nvCxnSpPr>
+        <p:spPr>
+          <a:xfrm>
+            <a:off x="3712888" y="466909"/>
+            <a:ext cx="344194" cy="0"/>
+          </a:xfrm>
+          <a:prstGeom prst="straightConnector1">
+            <a:avLst/>
+          </a:prstGeom>
+          <a:ln w="25400" cap="flat" cmpd="sng">
+            <a:solidFill>
+              <a:srgbClr val="000000"/>
+            </a:solidFill>
+            <a:prstDash val="solid"/>
+            <a:round/>
+            <a:headEnd type="none" w="med" len="med"/>
+            <a:tailEnd type="arrow" w="sm" len="lg"/>
+          </a:ln>
+        </p:spPr>
+      </p:cxnSp>
       <p:sp>
         <p:nvSpPr>
           <p:cNvPr id="1073743875" name="文本框 1073743874"/>
@@ -3638,8 +3761,8 @@
         </p:nvSpPr>
         <p:spPr>
           <a:xfrm>
-            <a:off x="166672" y="165066"/>
-            <a:ext cx="1082778" cy="5094486"/>
+            <a:off x="166370" y="150495"/>
+            <a:ext cx="1082675" cy="6779260"/>
           </a:xfrm>
           <a:prstGeom prst="rect">
             <a:avLst/>
@@ -3719,8 +3842,8 @@
         </p:nvSpPr>
         <p:spPr>
           <a:xfrm>
-            <a:off x="1576705" y="172720"/>
-            <a:ext cx="2136140" cy="832485"/>
+            <a:off x="1576816" y="150945"/>
+            <a:ext cx="2136291" cy="832544"/>
           </a:xfrm>
           <a:prstGeom prst="rect">
             <a:avLst/>
@@ -3803,8 +3926,8 @@
         </p:nvSpPr>
         <p:spPr>
           <a:xfrm>
-            <a:off x="225159" y="5411961"/>
-            <a:ext cx="6485535" cy="275590"/>
+            <a:off x="225175" y="7082881"/>
+            <a:ext cx="6485993" cy="275590"/>
           </a:xfrm>
           <a:prstGeom prst="rect">
             <a:avLst/>
@@ -3829,14 +3952,7 @@
                 <a:latin typeface="Times New Roman" panose="02020603050405020304" charset="0"/>
                 <a:cs typeface="Times New Roman" panose="02020603050405020304" charset="0"/>
               </a:rPr>
-              <a:t>. </a:t>
-            </a:r>
-            <a:r>
-              <a:rPr lang="en-US" altLang="zh-CN" sz="1200">
-                <a:latin typeface="Times New Roman" panose="02020603050405020304" charset="0"/>
-                <a:cs typeface="Times New Roman" panose="02020603050405020304" charset="0"/>
-              </a:rPr>
-              <a:t>Overview of the data processing pipeline.</a:t>
+              <a:t>. Overview of the data processing pipeline.</a:t>
             </a:r>
             <a:endParaRPr lang="en-US" altLang="zh-CN" sz="1200">
               <a:latin typeface="Times New Roman" panose="02020603050405020304" charset="0"/>
@@ -3853,8 +3969,8 @@
         </p:nvSpPr>
         <p:spPr>
           <a:xfrm>
-            <a:off x="4057015" y="172561"/>
-            <a:ext cx="1584000" cy="648000"/>
+            <a:off x="4057301" y="150786"/>
+            <a:ext cx="1584112" cy="648046"/>
           </a:xfrm>
           <a:prstGeom prst="rect">
             <a:avLst/>
@@ -3954,8 +4070,8 @@
         </p:nvSpPr>
         <p:spPr>
           <a:xfrm>
-            <a:off x="1576582" y="1613387"/>
-            <a:ext cx="2136344" cy="647762"/>
+            <a:off x="1576693" y="1591714"/>
+            <a:ext cx="2136495" cy="647808"/>
           </a:xfrm>
           <a:prstGeom prst="rect">
             <a:avLst/>
@@ -4027,8 +4143,8 @@
         </p:nvSpPr>
         <p:spPr>
           <a:xfrm>
-            <a:off x="1576582" y="2455036"/>
-            <a:ext cx="2136344" cy="827484"/>
+            <a:off x="1576693" y="2433422"/>
+            <a:ext cx="2136495" cy="827542"/>
           </a:xfrm>
           <a:prstGeom prst="rect">
             <a:avLst/>
@@ -4100,8 +4216,8 @@
         </p:nvSpPr>
         <p:spPr>
           <a:xfrm>
-            <a:off x="1576582" y="3526795"/>
-            <a:ext cx="2136344" cy="647762"/>
+            <a:off x="1576693" y="3505257"/>
+            <a:ext cx="2136495" cy="647808"/>
           </a:xfrm>
           <a:prstGeom prst="rect">
             <a:avLst/>
@@ -4173,8 +4289,8 @@
         </p:nvSpPr>
         <p:spPr>
           <a:xfrm>
-            <a:off x="1576582" y="4521672"/>
-            <a:ext cx="2136344" cy="647762"/>
+            <a:off x="1576693" y="4500204"/>
+            <a:ext cx="2136495" cy="647808"/>
           </a:xfrm>
           <a:prstGeom prst="rect">
             <a:avLst/>
@@ -4246,8 +4362,8 @@
         </p:nvSpPr>
         <p:spPr>
           <a:xfrm>
-            <a:off x="6856730" y="280561"/>
-            <a:ext cx="962025" cy="432000"/>
+            <a:off x="6857214" y="258793"/>
+            <a:ext cx="962093" cy="432030"/>
           </a:xfrm>
           <a:prstGeom prst="rect">
             <a:avLst/>
@@ -4296,8 +4412,8 @@
         </p:nvSpPr>
         <p:spPr>
           <a:xfrm>
-            <a:off x="8714740" y="190500"/>
-            <a:ext cx="3030855" cy="645160"/>
+            <a:off x="8715355" y="168726"/>
+            <a:ext cx="3031069" cy="645206"/>
           </a:xfrm>
           <a:prstGeom prst="rect">
             <a:avLst/>
@@ -4382,8 +4498,8 @@
         </p:nvSpPr>
         <p:spPr>
           <a:xfrm>
-            <a:off x="4057015" y="1613268"/>
-            <a:ext cx="1584000" cy="648000"/>
+            <a:off x="4057301" y="1591595"/>
+            <a:ext cx="1584112" cy="648046"/>
           </a:xfrm>
           <a:prstGeom prst="rect">
             <a:avLst/>
@@ -4480,8 +4596,8 @@
         </p:nvSpPr>
         <p:spPr>
           <a:xfrm>
-            <a:off x="4057015" y="2544778"/>
-            <a:ext cx="1584000" cy="648000"/>
+            <a:off x="4057301" y="2523170"/>
+            <a:ext cx="1584112" cy="648046"/>
           </a:xfrm>
           <a:prstGeom prst="rect">
             <a:avLst/>
@@ -4592,8 +4708,8 @@
         </p:nvSpPr>
         <p:spPr>
           <a:xfrm>
-            <a:off x="4057015" y="3436676"/>
-            <a:ext cx="2448000" cy="828000"/>
+            <a:off x="4057301" y="3415131"/>
+            <a:ext cx="2448173" cy="828058"/>
           </a:xfrm>
           <a:prstGeom prst="rect">
             <a:avLst/>
@@ -4711,8 +4827,8 @@
         </p:nvSpPr>
         <p:spPr>
           <a:xfrm>
-            <a:off x="8714499" y="1169035"/>
-            <a:ext cx="3030855" cy="318770"/>
+            <a:off x="8715114" y="1147330"/>
+            <a:ext cx="3031069" cy="318792"/>
           </a:xfrm>
           <a:prstGeom prst="rect">
             <a:avLst/>
@@ -4761,8 +4877,8 @@
         </p:nvSpPr>
         <p:spPr>
           <a:xfrm>
-            <a:off x="8714740" y="1631315"/>
-            <a:ext cx="3030855" cy="501015"/>
+            <a:off x="8715355" y="1609643"/>
+            <a:ext cx="3031069" cy="501050"/>
           </a:xfrm>
           <a:prstGeom prst="rect">
             <a:avLst/>
@@ -4827,8 +4943,8 @@
         </p:nvSpPr>
         <p:spPr>
           <a:xfrm>
-            <a:off x="8714603" y="2562778"/>
-            <a:ext cx="3030647" cy="612000"/>
+            <a:off x="8715218" y="2541172"/>
+            <a:ext cx="3030861" cy="612043"/>
           </a:xfrm>
           <a:prstGeom prst="rect">
             <a:avLst/>
@@ -4893,8 +5009,8 @@
         </p:nvSpPr>
         <p:spPr>
           <a:xfrm>
-            <a:off x="8714603" y="3544676"/>
-            <a:ext cx="3030647" cy="612000"/>
+            <a:off x="8715218" y="3523139"/>
+            <a:ext cx="3030861" cy="612043"/>
           </a:xfrm>
           <a:prstGeom prst="rect">
             <a:avLst/>
@@ -4959,8 +5075,8 @@
         </p:nvSpPr>
         <p:spPr>
           <a:xfrm>
-            <a:off x="8714603" y="4539553"/>
-            <a:ext cx="3030647" cy="612000"/>
+            <a:off x="8715218" y="4518086"/>
+            <a:ext cx="3030861" cy="612043"/>
           </a:xfrm>
           <a:prstGeom prst="rect">
             <a:avLst/>
@@ -5025,8 +5141,8 @@
         </p:nvCxnSpPr>
         <p:spPr>
           <a:xfrm>
-            <a:off x="3712626" y="1937097"/>
-            <a:ext cx="344170" cy="0"/>
+            <a:off x="3712888" y="1915446"/>
+            <a:ext cx="344194" cy="0"/>
           </a:xfrm>
           <a:prstGeom prst="straightConnector1">
             <a:avLst/>
@@ -5050,8 +5166,8 @@
         </p:nvCxnSpPr>
         <p:spPr>
           <a:xfrm>
-            <a:off x="3712626" y="2869912"/>
-            <a:ext cx="344170" cy="0"/>
+            <a:off x="3712888" y="2848327"/>
+            <a:ext cx="344194" cy="0"/>
           </a:xfrm>
           <a:prstGeom prst="straightConnector1">
             <a:avLst/>
@@ -5075,8 +5191,8 @@
         </p:nvCxnSpPr>
         <p:spPr>
           <a:xfrm>
-            <a:off x="3712626" y="3850352"/>
-            <a:ext cx="344170" cy="0"/>
+            <a:off x="3712888" y="3828836"/>
+            <a:ext cx="344194" cy="0"/>
           </a:xfrm>
           <a:prstGeom prst="straightConnector1">
             <a:avLst/>
@@ -5095,16 +5211,13 @@
       <p:cxnSp>
         <p:nvCxnSpPr>
           <p:cNvPr id="73" name="直接箭头连接符 13"/>
-          <p:cNvCxnSpPr>
-            <a:stCxn id="48" idx="3"/>
-            <a:endCxn id="74" idx="1"/>
-          </p:cNvCxnSpPr>
+          <p:cNvCxnSpPr/>
           <p:nvPr/>
         </p:nvCxnSpPr>
         <p:spPr>
           <a:xfrm>
-            <a:off x="3712626" y="4845397"/>
-            <a:ext cx="344170" cy="0"/>
+            <a:off x="3712888" y="4823952"/>
+            <a:ext cx="344194" cy="0"/>
           </a:xfrm>
           <a:prstGeom prst="straightConnector1">
             <a:avLst/>
@@ -5128,8 +5241,8 @@
         </p:nvSpPr>
         <p:spPr>
           <a:xfrm>
-            <a:off x="4057015" y="4431553"/>
-            <a:ext cx="2448000" cy="828000"/>
+            <a:off x="4057301" y="4410078"/>
+            <a:ext cx="2448173" cy="828058"/>
           </a:xfrm>
           <a:prstGeom prst="rect">
             <a:avLst/>
@@ -5247,8 +5360,8 @@
         </p:nvSpPr>
         <p:spPr>
           <a:xfrm>
-            <a:off x="6856730" y="1721268"/>
-            <a:ext cx="962025" cy="432000"/>
+            <a:off x="6857214" y="1699602"/>
+            <a:ext cx="962093" cy="432030"/>
           </a:xfrm>
           <a:prstGeom prst="rect">
             <a:avLst/>
@@ -5297,8 +5410,8 @@
         </p:nvSpPr>
         <p:spPr>
           <a:xfrm>
-            <a:off x="6856730" y="2562778"/>
-            <a:ext cx="1476000" cy="612000"/>
+            <a:off x="6857214" y="2541172"/>
+            <a:ext cx="1476104" cy="612043"/>
           </a:xfrm>
           <a:prstGeom prst="rect">
             <a:avLst/>
@@ -5347,8 +5460,8 @@
         </p:nvSpPr>
         <p:spPr>
           <a:xfrm>
-            <a:off x="6856730" y="3634676"/>
-            <a:ext cx="1476000" cy="432000"/>
+            <a:off x="6857214" y="3613145"/>
+            <a:ext cx="1476104" cy="432030"/>
           </a:xfrm>
           <a:prstGeom prst="rect">
             <a:avLst/>
@@ -5397,8 +5510,8 @@
         </p:nvSpPr>
         <p:spPr>
           <a:xfrm>
-            <a:off x="6856730" y="4629553"/>
-            <a:ext cx="1476000" cy="432000"/>
+            <a:off x="6857214" y="4608092"/>
+            <a:ext cx="1476104" cy="432030"/>
           </a:xfrm>
           <a:prstGeom prst="rect">
             <a:avLst/>
@@ -5447,8 +5560,8 @@
         </p:nvCxnSpPr>
         <p:spPr>
           <a:xfrm>
-            <a:off x="5640486" y="488662"/>
-            <a:ext cx="1216025" cy="0"/>
+            <a:off x="5640884" y="466909"/>
+            <a:ext cx="1216111" cy="0"/>
           </a:xfrm>
           <a:prstGeom prst="straightConnector1">
             <a:avLst/>
@@ -5472,8 +5585,8 @@
         </p:nvCxnSpPr>
         <p:spPr>
           <a:xfrm>
-            <a:off x="5640486" y="1937268"/>
-            <a:ext cx="1216025" cy="0"/>
+            <a:off x="5640884" y="1915617"/>
+            <a:ext cx="1216111" cy="0"/>
           </a:xfrm>
           <a:prstGeom prst="straightConnector1">
             <a:avLst/>
@@ -5497,8 +5610,8 @@
         </p:nvCxnSpPr>
         <p:spPr>
           <a:xfrm>
-            <a:off x="5640486" y="2868813"/>
-            <a:ext cx="1216025" cy="0"/>
+            <a:off x="5640884" y="2847228"/>
+            <a:ext cx="1216111" cy="0"/>
           </a:xfrm>
           <a:prstGeom prst="straightConnector1">
             <a:avLst/>
@@ -5522,8 +5635,8 @@
         </p:nvCxnSpPr>
         <p:spPr>
           <a:xfrm>
-            <a:off x="6504721" y="3850523"/>
-            <a:ext cx="351790" cy="0"/>
+            <a:off x="6505180" y="3829007"/>
+            <a:ext cx="351815" cy="0"/>
           </a:xfrm>
           <a:prstGeom prst="straightConnector1">
             <a:avLst/>
@@ -5547,8 +5660,8 @@
         </p:nvCxnSpPr>
         <p:spPr>
           <a:xfrm>
-            <a:off x="6504721" y="4845568"/>
-            <a:ext cx="351790" cy="0"/>
+            <a:off x="6505180" y="4824123"/>
+            <a:ext cx="351815" cy="0"/>
           </a:xfrm>
           <a:prstGeom prst="straightConnector1">
             <a:avLst/>
@@ -5572,8 +5685,8 @@
         </p:nvCxnSpPr>
         <p:spPr>
           <a:xfrm>
-            <a:off x="8332251" y="4845568"/>
-            <a:ext cx="382270" cy="0"/>
+            <a:off x="8332839" y="4824123"/>
+            <a:ext cx="382297" cy="0"/>
           </a:xfrm>
           <a:prstGeom prst="straightConnector1">
             <a:avLst/>
@@ -5597,8 +5710,8 @@
         </p:nvCxnSpPr>
         <p:spPr>
           <a:xfrm>
-            <a:off x="8332251" y="3850523"/>
-            <a:ext cx="382270" cy="0"/>
+            <a:off x="8332839" y="3829007"/>
+            <a:ext cx="382297" cy="0"/>
           </a:xfrm>
           <a:prstGeom prst="straightConnector1">
             <a:avLst/>
@@ -5622,8 +5735,8 @@
         </p:nvCxnSpPr>
         <p:spPr>
           <a:xfrm>
-            <a:off x="8332251" y="2868813"/>
-            <a:ext cx="382270" cy="0"/>
+            <a:off x="8332839" y="2847228"/>
+            <a:ext cx="382297" cy="0"/>
           </a:xfrm>
           <a:prstGeom prst="straightConnector1">
             <a:avLst/>
@@ -5647,8 +5760,8 @@
         </p:nvCxnSpPr>
         <p:spPr>
           <a:xfrm>
-            <a:off x="7818536" y="1937268"/>
-            <a:ext cx="895985" cy="0"/>
+            <a:off x="7819088" y="1915617"/>
+            <a:ext cx="896048" cy="0"/>
           </a:xfrm>
           <a:prstGeom prst="straightConnector1">
             <a:avLst/>
@@ -5674,8 +5787,8 @@
         </p:nvCxnSpPr>
         <p:spPr>
           <a:xfrm flipV="1">
-            <a:off x="7818536" y="486928"/>
-            <a:ext cx="887095" cy="9525"/>
+            <a:off x="7819088" y="465175"/>
+            <a:ext cx="887158" cy="9526"/>
           </a:xfrm>
           <a:prstGeom prst="straightConnector1">
             <a:avLst/>
@@ -5699,8 +5812,8 @@
         </p:nvCxnSpPr>
         <p:spPr>
           <a:xfrm>
-            <a:off x="8328441" y="1325128"/>
-            <a:ext cx="394970" cy="5715"/>
+            <a:off x="8329029" y="1303434"/>
+            <a:ext cx="394998" cy="5715"/>
           </a:xfrm>
           <a:prstGeom prst="straightConnector1">
             <a:avLst/>
@@ -5724,8 +5837,8 @@
         </p:nvCxnSpPr>
         <p:spPr>
           <a:xfrm flipV="1">
-            <a:off x="8332730" y="1312545"/>
-            <a:ext cx="7620" cy="625475"/>
+            <a:off x="8333318" y="1290850"/>
+            <a:ext cx="7621" cy="625519"/>
           </a:xfrm>
           <a:prstGeom prst="line">
             <a:avLst/>
@@ -5752,6 +5865,651 @@
           </a:fontRef>
         </p:style>
       </p:cxnSp>
+      <p:cxnSp>
+        <p:nvCxnSpPr>
+          <p:cNvPr id="4" name="直接箭头连接符 13"/>
+          <p:cNvCxnSpPr/>
+          <p:nvPr/>
+        </p:nvCxnSpPr>
+        <p:spPr>
+          <a:xfrm>
+            <a:off x="3712888" y="5704727"/>
+            <a:ext cx="344194" cy="0"/>
+          </a:xfrm>
+          <a:prstGeom prst="straightConnector1">
+            <a:avLst/>
+          </a:prstGeom>
+          <a:ln w="25400" cap="flat" cmpd="sng">
+            <a:solidFill>
+              <a:srgbClr val="000000"/>
+            </a:solidFill>
+            <a:prstDash val="solid"/>
+            <a:round/>
+            <a:headEnd type="none" w="med" len="med"/>
+            <a:tailEnd type="arrow" w="sm" len="lg"/>
+          </a:ln>
+        </p:spPr>
+      </p:cxnSp>
+      <p:cxnSp>
+        <p:nvCxnSpPr>
+          <p:cNvPr id="5" name="直接箭头连接符 13"/>
+          <p:cNvCxnSpPr/>
+          <p:nvPr/>
+        </p:nvCxnSpPr>
+        <p:spPr>
+          <a:xfrm>
+            <a:off x="6505180" y="5704898"/>
+            <a:ext cx="351814" cy="0"/>
+          </a:xfrm>
+          <a:prstGeom prst="straightConnector1">
+            <a:avLst/>
+          </a:prstGeom>
+          <a:ln w="25400" cap="flat" cmpd="sng">
+            <a:solidFill>
+              <a:srgbClr val="000000"/>
+            </a:solidFill>
+            <a:prstDash val="solid"/>
+            <a:round/>
+            <a:headEnd type="none" w="med" len="med"/>
+            <a:tailEnd type="arrow" w="sm" len="lg"/>
+          </a:ln>
+        </p:spPr>
+      </p:cxnSp>
+      <p:cxnSp>
+        <p:nvCxnSpPr>
+          <p:cNvPr id="6" name="直接箭头连接符 13"/>
+          <p:cNvCxnSpPr/>
+          <p:nvPr/>
+        </p:nvCxnSpPr>
+        <p:spPr>
+          <a:xfrm>
+            <a:off x="7892150" y="5704263"/>
+            <a:ext cx="822960" cy="635"/>
+          </a:xfrm>
+          <a:prstGeom prst="straightConnector1">
+            <a:avLst/>
+          </a:prstGeom>
+          <a:ln w="25400" cap="flat" cmpd="sng">
+            <a:solidFill>
+              <a:srgbClr val="000000"/>
+            </a:solidFill>
+            <a:prstDash val="solid"/>
+            <a:round/>
+            <a:headEnd type="none" w="med" len="med"/>
+            <a:tailEnd type="arrow" w="sm" len="lg"/>
+          </a:ln>
+        </p:spPr>
+      </p:cxnSp>
+      <p:sp>
+        <p:nvSpPr>
+          <p:cNvPr id="8" name="文本框 7"/>
+          <p:cNvSpPr txBox="1"/>
+          <p:nvPr/>
+        </p:nvSpPr>
+        <p:spPr>
+          <a:xfrm>
+            <a:off x="1576694" y="5397541"/>
+            <a:ext cx="2136494" cy="647808"/>
+          </a:xfrm>
+          <a:prstGeom prst="rect">
+            <a:avLst/>
+          </a:prstGeom>
+          <a:solidFill>
+            <a:schemeClr val="accent2">
+              <a:lumMod val="20000"/>
+              <a:lumOff val="80000"/>
+            </a:schemeClr>
+          </a:solidFill>
+          <a:ln w="12700" cap="flat" cmpd="sng">
+            <a:solidFill>
+              <a:srgbClr val="000000"/>
+            </a:solidFill>
+            <a:prstDash val="solid"/>
+            <a:round/>
+            <a:headEnd type="none" w="med" len="med"/>
+            <a:tailEnd type="none" w="med" len="med"/>
+          </a:ln>
+        </p:spPr>
+        <p:txBody>
+          <a:bodyPr vert="horz" wrap="square" anchor="ctr" anchorCtr="0">
+            <a:noAutofit/>
+          </a:bodyPr>
+          <a:p>
+            <a:pPr lvl="0" algn="l">
+              <a:buClrTx/>
+              <a:buSzTx/>
+              <a:buFontTx/>
+            </a:pPr>
+            <a:r>
+              <a:rPr lang="en-US" altLang="zh-CN" sz="1200" b="1">
+                <a:solidFill>
+                  <a:schemeClr val="tx1"/>
+                </a:solidFill>
+                <a:latin typeface="Times New Roman" panose="02020603050405020304" charset="0"/>
+                <a:cs typeface="Times New Roman" panose="02020603050405020304" charset="0"/>
+                <a:sym typeface="+mn-ea"/>
+              </a:rPr>
+              <a:t>Objective 6: </a:t>
+            </a:r>
+            <a:r>
+              <a:rPr lang="en-US" altLang="zh-CN" sz="1200">
+                <a:solidFill>
+                  <a:schemeClr val="tx1"/>
+                </a:solidFill>
+                <a:latin typeface="Times New Roman" panose="02020603050405020304" charset="0"/>
+                <a:cs typeface="Times New Roman" panose="02020603050405020304" charset="0"/>
+                <a:sym typeface="+mn-ea"/>
+              </a:rPr>
+              <a:t>Confirm whether or not our findings are statistical artifacts.</a:t>
+            </a:r>
+            <a:endParaRPr lang="en-US" altLang="zh-CN" sz="1200">
+              <a:solidFill>
+                <a:schemeClr val="tx1"/>
+              </a:solidFill>
+              <a:latin typeface="Times New Roman" panose="02020603050405020304" charset="0"/>
+              <a:cs typeface="Times New Roman" panose="02020603050405020304" charset="0"/>
+              <a:sym typeface="+mn-ea"/>
+            </a:endParaRPr>
+          </a:p>
+        </p:txBody>
+      </p:sp>
+      <p:sp>
+        <p:nvSpPr>
+          <p:cNvPr id="9" name="文本框 8"/>
+          <p:cNvSpPr txBox="1"/>
+          <p:nvPr/>
+        </p:nvSpPr>
+        <p:spPr>
+          <a:xfrm>
+            <a:off x="4057650" y="5559445"/>
+            <a:ext cx="2447925" cy="324000"/>
+          </a:xfrm>
+          <a:prstGeom prst="rect">
+            <a:avLst/>
+          </a:prstGeom>
+          <a:solidFill>
+            <a:schemeClr val="bg1">
+              <a:lumMod val="95000"/>
+            </a:schemeClr>
+          </a:solidFill>
+          <a:ln w="12700" cap="flat" cmpd="sng">
+            <a:solidFill>
+              <a:srgbClr val="000000"/>
+            </a:solidFill>
+            <a:prstDash val="solid"/>
+            <a:round/>
+            <a:headEnd type="none" w="med" len="med"/>
+            <a:tailEnd type="none" w="med" len="med"/>
+          </a:ln>
+        </p:spPr>
+        <p:txBody>
+          <a:bodyPr vert="horz" wrap="square" anchor="ctr" anchorCtr="0">
+            <a:noAutofit/>
+          </a:bodyPr>
+          <a:p>
+            <a:pPr indent="0" algn="ctr" fontAlgn="auto"/>
+            <a:r>
+              <a:rPr sz="1200">
+                <a:latin typeface="Times New Roman" panose="02020603050405020304" charset="0"/>
+                <a:cs typeface="Times New Roman" panose="02020603050405020304" charset="0"/>
+                <a:sym typeface="+mn-ea"/>
+              </a:rPr>
+              <a:t>Stratif</a:t>
+            </a:r>
+            <a:r>
+              <a:rPr lang="en-US" sz="1200">
+                <a:latin typeface="Times New Roman" panose="02020603050405020304" charset="0"/>
+                <a:cs typeface="Times New Roman" panose="02020603050405020304" charset="0"/>
+                <a:sym typeface="+mn-ea"/>
+              </a:rPr>
+              <a:t>y </a:t>
+            </a:r>
+            <a:r>
+              <a:rPr lang="en-US" altLang="zh-CN" sz="1200">
+                <a:latin typeface="Times New Roman" panose="02020603050405020304" charset="0"/>
+                <a:cs typeface="Times New Roman" panose="02020603050405020304" charset="0"/>
+                <a:sym typeface="+mn-ea"/>
+              </a:rPr>
+              <a:t>the data</a:t>
+            </a:r>
+            <a:r>
+              <a:rPr sz="1200">
+                <a:latin typeface="Times New Roman" panose="02020603050405020304" charset="0"/>
+                <a:cs typeface="Times New Roman" panose="02020603050405020304" charset="0"/>
+                <a:sym typeface="+mn-ea"/>
+              </a:rPr>
+              <a:t> by </a:t>
+            </a:r>
+            <a:r>
+              <a:rPr lang="en-US" sz="1200">
+                <a:latin typeface="Times New Roman" panose="02020603050405020304" charset="0"/>
+                <a:cs typeface="Times New Roman" panose="02020603050405020304" charset="0"/>
+                <a:sym typeface="+mn-ea"/>
+              </a:rPr>
+              <a:t>sex and </a:t>
+            </a:r>
+            <a:r>
+              <a:rPr sz="1200">
+                <a:latin typeface="Times New Roman" panose="02020603050405020304" charset="0"/>
+                <a:cs typeface="Times New Roman" panose="02020603050405020304" charset="0"/>
+                <a:sym typeface="+mn-ea"/>
+              </a:rPr>
+              <a:t>age</a:t>
+            </a:r>
+            <a:endParaRPr lang="zh-CN" altLang="en-US" sz="1200">
+              <a:latin typeface="Times New Roman" panose="02020603050405020304" charset="0"/>
+              <a:cs typeface="Times New Roman" panose="02020603050405020304" charset="0"/>
+            </a:endParaRPr>
+          </a:p>
+        </p:txBody>
+      </p:sp>
+      <p:sp>
+        <p:nvSpPr>
+          <p:cNvPr id="10" name="文本框 9"/>
+          <p:cNvSpPr txBox="1"/>
+          <p:nvPr/>
+        </p:nvSpPr>
+        <p:spPr>
+          <a:xfrm>
+            <a:off x="6857214" y="5505430"/>
+            <a:ext cx="1476104" cy="432030"/>
+          </a:xfrm>
+          <a:prstGeom prst="rect">
+            <a:avLst/>
+          </a:prstGeom>
+          <a:solidFill>
+            <a:schemeClr val="accent4">
+              <a:lumMod val="20000"/>
+              <a:lumOff val="80000"/>
+            </a:schemeClr>
+          </a:solidFill>
+          <a:ln w="12700" cap="flat" cmpd="sng">
+            <a:solidFill>
+              <a:srgbClr val="000000"/>
+            </a:solidFill>
+            <a:prstDash val="solid"/>
+            <a:round/>
+            <a:headEnd type="none" w="med" len="med"/>
+            <a:tailEnd type="none" w="med" len="med"/>
+          </a:ln>
+        </p:spPr>
+        <p:txBody>
+          <a:bodyPr vert="horz" wrap="square" anchor="ctr" anchorCtr="0">
+            <a:noAutofit/>
+          </a:bodyPr>
+          <a:p>
+            <a:pPr indent="0" algn="ctr" fontAlgn="auto"/>
+            <a:r>
+              <a:rPr lang="en-US" altLang="zh-CN" sz="1200">
+                <a:latin typeface="Times New Roman" panose="02020603050405020304" charset="0"/>
+                <a:cs typeface="Times New Roman" panose="02020603050405020304" charset="0"/>
+                <a:sym typeface="+mn-ea"/>
+              </a:rPr>
+              <a:t>Randomization test</a:t>
+            </a:r>
+            <a:endParaRPr lang="en-US" altLang="zh-CN" sz="1200">
+              <a:latin typeface="Times New Roman" panose="02020603050405020304" charset="0"/>
+              <a:cs typeface="Times New Roman" panose="02020603050405020304" charset="0"/>
+            </a:endParaRPr>
+          </a:p>
+        </p:txBody>
+      </p:sp>
+      <p:sp>
+        <p:nvSpPr>
+          <p:cNvPr id="11" name="文本框 10"/>
+          <p:cNvSpPr txBox="1"/>
+          <p:nvPr/>
+        </p:nvSpPr>
+        <p:spPr>
+          <a:xfrm>
+            <a:off x="8715218" y="5415424"/>
+            <a:ext cx="3030861" cy="612044"/>
+          </a:xfrm>
+          <a:prstGeom prst="rect">
+            <a:avLst/>
+          </a:prstGeom>
+          <a:solidFill>
+            <a:schemeClr val="accent5">
+              <a:lumMod val="20000"/>
+              <a:lumOff val="80000"/>
+            </a:schemeClr>
+          </a:solidFill>
+          <a:ln w="12700" cap="flat" cmpd="sng">
+            <a:solidFill>
+              <a:srgbClr val="000000"/>
+            </a:solidFill>
+            <a:prstDash val="solid"/>
+            <a:round/>
+            <a:headEnd type="none" w="med" len="med"/>
+            <a:tailEnd type="none" w="med" len="med"/>
+          </a:ln>
+        </p:spPr>
+        <p:txBody>
+          <a:bodyPr vert="horz" wrap="square" anchor="ctr" anchorCtr="0">
+            <a:noAutofit/>
+          </a:bodyPr>
+          <a:p>
+            <a:pPr indent="0" algn="ctr" fontAlgn="auto"/>
+            <a:r>
+              <a:rPr lang="en-US" altLang="zh-CN" sz="1200">
+                <a:solidFill>
+                  <a:schemeClr val="tx1"/>
+                </a:solidFill>
+                <a:latin typeface="Times New Roman" panose="02020603050405020304" charset="0"/>
+                <a:cs typeface="Times New Roman" panose="02020603050405020304" charset="0"/>
+              </a:rPr>
+              <a:t>The constraint is sensitive to the actual pairing of weight and height, making it unlikely to be a pure statistical artifact</a:t>
+            </a:r>
+            <a:r>
+              <a:rPr lang="en-US" altLang="zh-CN" sz="1200" b="1">
+                <a:solidFill>
+                  <a:schemeClr val="tx1"/>
+                </a:solidFill>
+                <a:latin typeface="Times New Roman" panose="02020603050405020304" charset="0"/>
+                <a:cs typeface="Times New Roman" panose="02020603050405020304" charset="0"/>
+              </a:rPr>
+              <a:t> (Fig. S7)</a:t>
+            </a:r>
+            <a:endParaRPr lang="en-US" altLang="zh-CN" sz="1200" b="1">
+              <a:solidFill>
+                <a:schemeClr val="tx1"/>
+              </a:solidFill>
+              <a:latin typeface="Times New Roman" panose="02020603050405020304" charset="0"/>
+              <a:cs typeface="Times New Roman" panose="02020603050405020304" charset="0"/>
+            </a:endParaRPr>
+          </a:p>
+        </p:txBody>
+      </p:sp>
+      <p:sp>
+        <p:nvSpPr>
+          <p:cNvPr id="12" name="文本框 11"/>
+          <p:cNvSpPr txBox="1"/>
+          <p:nvPr/>
+        </p:nvSpPr>
+        <p:spPr>
+          <a:xfrm>
+            <a:off x="1576694" y="6265536"/>
+            <a:ext cx="2136494" cy="647808"/>
+          </a:xfrm>
+          <a:prstGeom prst="rect">
+            <a:avLst/>
+          </a:prstGeom>
+          <a:solidFill>
+            <a:schemeClr val="accent2">
+              <a:lumMod val="20000"/>
+              <a:lumOff val="80000"/>
+            </a:schemeClr>
+          </a:solidFill>
+          <a:ln w="12700" cap="flat" cmpd="sng">
+            <a:solidFill>
+              <a:srgbClr val="000000"/>
+            </a:solidFill>
+            <a:prstDash val="solid"/>
+            <a:round/>
+            <a:headEnd type="none" w="med" len="med"/>
+            <a:tailEnd type="none" w="med" len="med"/>
+          </a:ln>
+        </p:spPr>
+        <p:txBody>
+          <a:bodyPr vert="horz" wrap="square" anchor="ctr" anchorCtr="0">
+            <a:noAutofit/>
+          </a:bodyPr>
+          <a:p>
+            <a:pPr lvl="0" algn="l">
+              <a:buClrTx/>
+              <a:buSzTx/>
+              <a:buFontTx/>
+            </a:pPr>
+            <a:r>
+              <a:rPr lang="en-US" altLang="zh-CN" sz="1200" b="1">
+                <a:solidFill>
+                  <a:schemeClr val="tx1"/>
+                </a:solidFill>
+                <a:latin typeface="Times New Roman" panose="02020603050405020304" charset="0"/>
+                <a:cs typeface="Times New Roman" panose="02020603050405020304" charset="0"/>
+                <a:sym typeface="+mn-ea"/>
+              </a:rPr>
+              <a:t>Objective 7: </a:t>
+            </a:r>
+            <a:r>
+              <a:rPr lang="en-US" altLang="zh-CN" sz="1200">
+                <a:solidFill>
+                  <a:schemeClr val="tx1"/>
+                </a:solidFill>
+                <a:latin typeface="Times New Roman" panose="02020603050405020304" charset="0"/>
+                <a:cs typeface="Times New Roman" panose="02020603050405020304" charset="0"/>
+                <a:sym typeface="+mn-ea"/>
+              </a:rPr>
+              <a:t>Evaluating the eight candidate models by comparing their R</a:t>
+            </a:r>
+            <a:r>
+              <a:rPr lang="en-US" altLang="en-US" sz="1200">
+                <a:solidFill>
+                  <a:schemeClr val="tx1"/>
+                </a:solidFill>
+                <a:latin typeface="Times New Roman" panose="02020603050405020304" charset="0"/>
+                <a:cs typeface="Times New Roman" panose="02020603050405020304" charset="0"/>
+                <a:sym typeface="+mn-ea"/>
+              </a:rPr>
+              <a:t>².</a:t>
+            </a:r>
+            <a:endParaRPr lang="zh-CN" altLang="en-US" sz="1200">
+              <a:solidFill>
+                <a:schemeClr val="tx1"/>
+              </a:solidFill>
+              <a:latin typeface="Times New Roman" panose="02020603050405020304" charset="0"/>
+              <a:cs typeface="Times New Roman" panose="02020603050405020304" charset="0"/>
+              <a:sym typeface="+mn-ea"/>
+            </a:endParaRPr>
+          </a:p>
+        </p:txBody>
+      </p:sp>
+      <p:sp>
+        <p:nvSpPr>
+          <p:cNvPr id="13" name="文本框 12"/>
+          <p:cNvSpPr txBox="1"/>
+          <p:nvPr/>
+        </p:nvSpPr>
+        <p:spPr>
+          <a:xfrm>
+            <a:off x="4049046" y="6427440"/>
+            <a:ext cx="2448172" cy="324000"/>
+          </a:xfrm>
+          <a:prstGeom prst="rect">
+            <a:avLst/>
+          </a:prstGeom>
+          <a:solidFill>
+            <a:schemeClr val="bg1">
+              <a:lumMod val="95000"/>
+            </a:schemeClr>
+          </a:solidFill>
+          <a:ln w="12700" cap="flat" cmpd="sng">
+            <a:solidFill>
+              <a:srgbClr val="000000"/>
+            </a:solidFill>
+            <a:prstDash val="solid"/>
+            <a:round/>
+            <a:headEnd type="none" w="med" len="med"/>
+            <a:tailEnd type="none" w="med" len="med"/>
+          </a:ln>
+        </p:spPr>
+        <p:txBody>
+          <a:bodyPr vert="horz" wrap="square" anchor="ctr" anchorCtr="0">
+            <a:noAutofit/>
+          </a:bodyPr>
+          <a:p>
+            <a:pPr indent="0" algn="ctr" fontAlgn="auto"/>
+            <a:r>
+              <a:rPr sz="1200">
+                <a:latin typeface="Times New Roman" panose="02020603050405020304" charset="0"/>
+                <a:cs typeface="Times New Roman" panose="02020603050405020304" charset="0"/>
+                <a:sym typeface="+mn-ea"/>
+              </a:rPr>
+              <a:t>Stratif</a:t>
+            </a:r>
+            <a:r>
+              <a:rPr lang="en-US" sz="1200">
+                <a:latin typeface="Times New Roman" panose="02020603050405020304" charset="0"/>
+                <a:cs typeface="Times New Roman" panose="02020603050405020304" charset="0"/>
+                <a:sym typeface="+mn-ea"/>
+              </a:rPr>
+              <a:t>y </a:t>
+            </a:r>
+            <a:r>
+              <a:rPr lang="en-US" altLang="zh-CN" sz="1200">
+                <a:latin typeface="Times New Roman" panose="02020603050405020304" charset="0"/>
+                <a:cs typeface="Times New Roman" panose="02020603050405020304" charset="0"/>
+                <a:sym typeface="+mn-ea"/>
+              </a:rPr>
+              <a:t>the data</a:t>
+            </a:r>
+            <a:r>
+              <a:rPr sz="1200">
+                <a:latin typeface="Times New Roman" panose="02020603050405020304" charset="0"/>
+                <a:cs typeface="Times New Roman" panose="02020603050405020304" charset="0"/>
+                <a:sym typeface="+mn-ea"/>
+              </a:rPr>
+              <a:t> by </a:t>
+            </a:r>
+            <a:r>
+              <a:rPr lang="en-US" sz="1200">
+                <a:latin typeface="Times New Roman" panose="02020603050405020304" charset="0"/>
+                <a:cs typeface="Times New Roman" panose="02020603050405020304" charset="0"/>
+                <a:sym typeface="+mn-ea"/>
+              </a:rPr>
+              <a:t>sex and </a:t>
+            </a:r>
+            <a:r>
+              <a:rPr sz="1200">
+                <a:latin typeface="Times New Roman" panose="02020603050405020304" charset="0"/>
+                <a:cs typeface="Times New Roman" panose="02020603050405020304" charset="0"/>
+                <a:sym typeface="+mn-ea"/>
+              </a:rPr>
+              <a:t>age</a:t>
+            </a:r>
+            <a:endParaRPr lang="zh-CN" altLang="en-US" sz="1200">
+              <a:latin typeface="Times New Roman" panose="02020603050405020304" charset="0"/>
+              <a:cs typeface="Times New Roman" panose="02020603050405020304" charset="0"/>
+            </a:endParaRPr>
+          </a:p>
+        </p:txBody>
+      </p:sp>
+      <p:sp>
+        <p:nvSpPr>
+          <p:cNvPr id="14" name="文本框 13"/>
+          <p:cNvSpPr txBox="1"/>
+          <p:nvPr/>
+        </p:nvSpPr>
+        <p:spPr>
+          <a:xfrm>
+            <a:off x="6857214" y="6373425"/>
+            <a:ext cx="1476104" cy="432030"/>
+          </a:xfrm>
+          <a:prstGeom prst="rect">
+            <a:avLst/>
+          </a:prstGeom>
+          <a:solidFill>
+            <a:schemeClr val="accent4">
+              <a:lumMod val="20000"/>
+              <a:lumOff val="80000"/>
+            </a:schemeClr>
+          </a:solidFill>
+          <a:ln w="12700" cap="flat" cmpd="sng">
+            <a:solidFill>
+              <a:srgbClr val="000000"/>
+            </a:solidFill>
+            <a:prstDash val="solid"/>
+            <a:round/>
+            <a:headEnd type="none" w="med" len="med"/>
+            <a:tailEnd type="none" w="med" len="med"/>
+          </a:ln>
+        </p:spPr>
+        <p:txBody>
+          <a:bodyPr vert="horz" wrap="square" anchor="ctr" anchorCtr="0">
+            <a:noAutofit/>
+          </a:bodyPr>
+          <a:p>
+            <a:pPr indent="0" algn="ctr" fontAlgn="auto"/>
+            <a:r>
+              <a:rPr lang="en-US" altLang="zh-CN" sz="1200">
+                <a:latin typeface="Times New Roman" panose="02020603050405020304" charset="0"/>
+                <a:cs typeface="Times New Roman" panose="02020603050405020304" charset="0"/>
+              </a:rPr>
+              <a:t>Model comparison</a:t>
+            </a:r>
+            <a:endParaRPr lang="en-US" altLang="zh-CN" sz="1200">
+              <a:latin typeface="Times New Roman" panose="02020603050405020304" charset="0"/>
+              <a:cs typeface="Times New Roman" panose="02020603050405020304" charset="0"/>
+            </a:endParaRPr>
+          </a:p>
+        </p:txBody>
+      </p:sp>
+      <p:sp>
+        <p:nvSpPr>
+          <p:cNvPr id="16" name="文本框 15"/>
+          <p:cNvSpPr txBox="1"/>
+          <p:nvPr/>
+        </p:nvSpPr>
+        <p:spPr>
+          <a:xfrm>
+            <a:off x="8715218" y="6283418"/>
+            <a:ext cx="3030861" cy="612044"/>
+          </a:xfrm>
+          <a:prstGeom prst="rect">
+            <a:avLst/>
+          </a:prstGeom>
+          <a:solidFill>
+            <a:schemeClr val="accent5">
+              <a:lumMod val="20000"/>
+              <a:lumOff val="80000"/>
+            </a:schemeClr>
+          </a:solidFill>
+          <a:ln w="12700" cap="flat" cmpd="sng">
+            <a:solidFill>
+              <a:srgbClr val="000000"/>
+            </a:solidFill>
+            <a:prstDash val="solid"/>
+            <a:round/>
+            <a:headEnd type="none" w="med" len="med"/>
+            <a:tailEnd type="none" w="med" len="med"/>
+          </a:ln>
+        </p:spPr>
+        <p:txBody>
+          <a:bodyPr vert="horz" wrap="square" anchor="ctr" anchorCtr="0">
+            <a:noAutofit/>
+          </a:bodyPr>
+          <a:p>
+            <a:pPr indent="0" algn="ctr" fontAlgn="auto"/>
+            <a:r>
+              <a:rPr lang="en-US" altLang="zh-CN" sz="1200">
+                <a:solidFill>
+                  <a:schemeClr val="tx1"/>
+                </a:solidFill>
+                <a:latin typeface="Times New Roman" panose="02020603050405020304" charset="0"/>
+                <a:cs typeface="Times New Roman" panose="02020603050405020304" charset="0"/>
+              </a:rPr>
+              <a:t>No single model shows a consistent, pronounced advantage over the others across all ages</a:t>
+            </a:r>
+            <a:r>
+              <a:rPr lang="en-US" altLang="zh-CN" sz="1200" b="1">
+                <a:solidFill>
+                  <a:schemeClr val="tx1"/>
+                </a:solidFill>
+                <a:latin typeface="Times New Roman" panose="02020603050405020304" charset="0"/>
+                <a:cs typeface="Times New Roman" panose="02020603050405020304" charset="0"/>
+              </a:rPr>
+              <a:t> (Fig. S8 )</a:t>
+            </a:r>
+            <a:endParaRPr lang="en-US" altLang="zh-CN" sz="1200" b="1">
+              <a:solidFill>
+                <a:schemeClr val="tx1"/>
+              </a:solidFill>
+              <a:latin typeface="Times New Roman" panose="02020603050405020304" charset="0"/>
+              <a:cs typeface="Times New Roman" panose="02020603050405020304" charset="0"/>
+            </a:endParaRPr>
+          </a:p>
+        </p:txBody>
+      </p:sp>
     </p:spTree>
   </p:cSld>
   <p:clrMapOvr>
